--- a/final/kubecon-2026-final.pptx
+++ b/final/kubecon-2026-final.pptx
@@ -19,21 +19,23 @@
     <p:sldId id="266" r:id="rId12"/>
     <p:sldId id="267" r:id="rId13"/>
     <p:sldId id="268" r:id="rId14"/>
-    <p:sldId id="271" r:id="rIdSDK2"/>
-    <p:sldId id="272" r:id="rIdSDK3"/>
-    <p:sldId id="273" r:id="rIdSDK4"/>
-    <p:sldId id="274" r:id="rIdSDK5"/>
-    <p:sldId id="275" r:id="rIdSDK6"/>
-    <p:sldId id="276" r:id="rIdSDK7"/>
-    <p:sldId id="277" r:id="rIdSDK8"/>
-    <p:sldId id="278" r:id="rIdSDK9"/>
-    <p:sldId id="279" r:id="rIdSDK10"/>
-    <p:sldId id="280" r:id="rIdSDK11"/>
     <p:sldId id="269" r:id="rId15"/>
     <p:sldId id="270" r:id="rId16"/>
+    <p:sldId id="273" r:id="rIdSDK2"/>
+    <p:sldId id="274" r:id="rIdSDK3"/>
+    <p:sldId id="275" r:id="rIdSDK4"/>
+    <p:sldId id="276" r:id="rIdSDK5"/>
+    <p:sldId id="277" r:id="rIdSDK6"/>
+    <p:sldId id="278" r:id="rIdSDK7"/>
+    <p:sldId id="279" r:id="rIdSDK8"/>
+    <p:sldId id="280" r:id="rIdSDK9"/>
+    <p:sldId id="281" r:id="rIdSDK10"/>
+    <p:sldId id="282" r:id="rIdSDK11"/>
+    <p:sldId id="271" r:id="rId17"/>
+    <p:sldId id="272" r:id="rId18"/>
   </p:sldIdLst>
   <p:notesMasterIdLst>
-    <p:notesMasterId r:id="rId17"/>
+    <p:notesMasterId r:id="rId19"/>
   </p:notesMasterIdLst>
   <p:sldSz cx="9144000" cy="5143500"/>
   <p:notesSz cx="5143500" cy="9144000"/>
@@ -528,7 +530,7 @@
             <a:r>
               <a:rPr lang="en-US" dirty="0"/>
               <a:t>SLIDE 1: The Next Era of Kubernetes Operator Lifecycle Management
-SPEAKER: OLM A — context / host; name to confirm
+SPEAKER: OLM A — context and installation; name to confirm
 START: 00:00
 DURATION: 00:45
 STATUS: 
@@ -624,14 +626,14 @@
           <a:p>
             <a:r>
               <a:rPr lang="en-US" dirty="0"/>
-              <a:t>SLIDE 10: Planned Helm content support
-SPEAKER: OLM C — content/catalogs/contributions; name to confirm
-START: 12:00
-DURATION: 02:00
-STATUS: PLANNED / helm+v2
-TAKEAWAY: The rendering contract targets deterministic chart behavior.
+              <a:t>SLIDE 10: Install a bundle directly
+SPEAKER: OLM B — lifecycle primitives and migration; name to confirm
+START: 11:30
+DURATION: 01:30
+STATUS: IN ACTIVE DEVELOPMENT / CONTROLLED BY FEATURE-GATE
+TAKEAWAY: Select a registry+v1 bundle by its OCI image reference.
 TALK TRACK / SOURCES / CAVEATS / REVIEW:
-helm+v2 is the user-confirmed canonical discriminator for versioned OLM Helm packaging/catalog content. Standard chart OCI identity is used, with rendered manifests managed through OLM lifecycle behavior. User values are parsed and validated during rendering. Deterministic rendering is the design goal: features are allow-listed to exclude non-deterministic functionality, with compatibility fixtures required to validate the supported subset. Dependencies are vendored. Hooks and keep behavior are unsupported in the proposal. CRDs use templates/; crds/ is unsupported. Chart release-object mappings and restricted template functions require compatibility testing. Moving CRDs affects upgrade, deletion and data handling. Implementation of proposed gates remains independently unconfirmed. Native chart OCI identity and future OCI catalog storage are separate scopes. Sources: supplied Helm planning brief and feature-planning context.
+PR #2907 is OPEN and unmerged as of the 2026-10-28 check. Present direct bundle installation as proposed behavior in active development. It supports registry+v1 bundles only and is controlled by the BoxcutterRuntime feature gate. The requested source uses sourceType: OCIImage and source.ociImage.ref. It bypasses catalog resolution. Describe CRD checks and other lifecycle safeguards according to the proposal's supported path; catalog bypass alone establishes no blanket removal of CRD safety. Pin the source revision and gate configuration before preparing an example. The session uses prepared examples without a live demo.
 SOURCE CONTEXT ROOT: /Users/jordan/Documents/devel/breadcrumbs/2026-kubecon-wip
 </a:t>
             </a:r>
@@ -721,14 +723,15 @@
           <a:p>
             <a:r>
               <a:rPr lang="en-US" dirty="0"/>
-              <a:t>SLIDE 11: Catalog performance and content types
-SPEAKER: OLM C — content/catalogs/contributions; name to confirm
-START: 14:00
-DURATION: 01:30
-STATUS: PLANNED / FUTURE WORK
-TAKEAWAY: Design for lower catalog-processing cost and additional content types.
+              <a:t>SLIDE 11: Planned Helm content support
+SPEAKER: OLM C — content, catalogs and contributions; name to confirm
+START: 13:00
+DURATION: 02:00
+STATUS: PLANNED / helm+v2
+TAKEAWAY: The rendering contract targets deterministic chart behavior.
 TALK TRACK / SOURCES / CAVEATS / REVIEW:
-Credit established FBC capabilities: plaintext editing, composition, extensibility, package-level metadata and version/release properties already exist. The v2 work refines the representation and consumers: less duplicated CSV metadata, version/release fields available directly rather than via property traversal, and explicit mediaType dispatch for installable formats including Helm. Arbitrary FBC schema extensibility alone does not supply end-to-end installation support for a new content type. Catalog processing efficiency is a design benefit to validate, with no measured speedup claimed. Show the practical resolution/metadata work the new representation is intended to reduce. The user-confirmed near-term focus is flexible OLMv1 schemas; OCI-native catalog storage, transport and selective fetching are future work. Channels and legacy graphs are excluded from v2; lifecycle/constraint metadata remains open. Sources: https://olm.operatorframework.io/docs/reference/file-based-catalogs/ ; supplied v2 catalog brief; feature-planning context.
+helm+v2 is the user-confirmed canonical discriminator for versioned OLM Helm packaging/catalog content. Standard chart OCI identity is used, with rendered manifests managed through OLM lifecycle behavior. User values are parsed and validated during rendering. Deterministic rendering is the design goal: features are allow-listed to exclude non-deterministic functionality, with compatibility fixtures required to validate the supported subset. Dependencies are vendored. Hooks and keep behavior are unsupported in the proposal. CRDs use templates/; crds/ is unsupported. Chart release-object mappings and restricted template functions require compatibility testing. Moving CRDs affects upgrade, deletion and data handling. Implementation of proposed gates remains independently unconfirmed. Native chart OCI identity and future OCI catalog storage are separate scopes. Sources: supplied Helm planning brief and feature-planning context.
+Transition: the direct-image source motivates future chart content support. The companion Helm experiment uses an OCI image config; standard Helm OCI config handling remains unverified.
 SOURCE CONTEXT ROOT: /Users/jordan/Documents/devel/breadcrumbs/2026-kubecon-wip
 </a:t>
             </a:r>
@@ -818,14 +821,14 @@
           <a:p>
             <a:r>
               <a:rPr lang="en-US" dirty="0"/>
-              <a:t>SLIDE 12: Contribute to Operator Framework
-SPEAKER: OLM C — content/catalogs/contributions; name to confirm
-START: 15:30
-DURATION: 01:00
-STATUS: PROJECT DEVELOPMENT
-TAKEAWAY: Help develop the project through documentation, code and test cases.
+              <a:t>SLIDE 12: Catalog performance and content types
+SPEAKER: OLM C — content, catalogs and contributions; name to confirm
+START: 15:00
+DURATION: 01:30
+STATUS: PLANNED / FUTURE WORK
+TAKEAWAY: Design for lower catalog-processing cost and additional content types.
 TALK TRACK / SOURCES / CAVEATS / REVIEW:
-Make an explicit project-development ask: contribute documentation, code, tests and fixtures to Operator Framework. Explain the distinction from submitting operator versions or upgrade graphs to a catalog; those submissions serve a separate publishing workflow. Useful development cases include rollout/configuration edge cases, migration eligibility, chart/values compatibility and schema behavior. Each contribution should identify the repository, issue or discussion, reproducible input and expected result. Maintainers still need to vet concrete task links and destinations. Companion examples are intended for online use; this session has no live demos. Sources: supplied feature-planning context; ../kubecon-2025-slide-context.md slide 15.
+Credit established FBC capabilities: plaintext editing, composition, extensibility, package-level metadata and version/release properties already exist. The v2 work refines the representation and consumers: less duplicated CSV metadata, version/release fields available directly rather than via property traversal, and explicit mediaType dispatch for installable formats including Helm. Arbitrary FBC schema extensibility alone does not supply end-to-end installation support for a new content type. Catalog processing efficiency is a design benefit to validate, with no measured speedup claimed. Show the practical resolution/metadata work the new representation is intended to reduce. The user-confirmed near-term focus is flexible OLMv1 schemas; OCI-native catalog storage, transport and selective fetching are future work. Channels and legacy graphs are excluded from v2; lifecycle/constraint metadata remains open. Sources: https://olm.operatorframework.io/docs/reference/file-based-catalogs/ ; supplied v2 catalog brief; feature-planning context.
 SOURCE CONTEXT ROOT: /Users/jordan/Documents/devel/breadcrumbs/2026-kubecon-wip
 </a:t>
             </a:r>
@@ -915,14 +918,14 @@
           <a:p>
             <a:r>
               <a:rPr lang="en-US" dirty="0"/>
-              <a:t>SLIDE 13: Operator Framework: Java Operator SDK
-SPEAKER: OLM C — content/catalogs/contributions; name to confirm
+              <a:t>SLIDE 13: Shared lifecycle logic in library-olm
+SPEAKER: OLM C — content, catalogs and contributions; name to confirm
 START: 16:30
-DURATION: 00:30
-STATUS: 
-TAKEAWAY: 
+DURATION: 01:00
+STATUS: IN ACTIVE DEVELOPMENT
+TAKEAWAY: Reuse lifecycle logic through a library with explicit contracts.
 TALK TRACK / SOURCES / CAVEATS / REVIEW:
-C hands off to Attila for Java Operator SDK. OLM packaging is language-neutral, and SDKs support controller implementation and reconciliation. Keep bundle metadata and the runnable controller image distinct in the spoken transition. The primary builder imports original SDK source slides 3–12 unchanged immediately after this divider. Each original SDK slide receives 60 seconds, for ten minutes total on final slides 14–23. Attila covers this segment exclusively.
+Describe library reuse, the current migration development examples and fixtures that record inputs and expected results. The example binaries exercise library behavior and provide contribution starting points. Broader controller, CLI and UI consumption remains a design intent requiring implementation evidence and explicit contracts. Successor semantics need a defined contract. Fixtures can cover legacy input or version/release selection while respecting the proposed v2 schema direction. Pin source versions when documenting examples. C connects catalog work with shared lifecycle logic. Sources: library-olm README/spec; supplied feature-planning context; ../kubecon-2025-slide-context.md slide 13.
 SOURCE CONTEXT ROOT: /Users/jordan/Documents/devel/breadcrumbs/2026-kubecon-wip
 </a:t>
             </a:r>
@@ -1012,14 +1015,14 @@
           <a:p>
             <a:r>
               <a:rPr lang="en-US" dirty="0"/>
-              <a:t>SLIDE 24: Resources and contribution steps
-SPEAKER: OLM A — session host; name to confirm
-START: 27:00
+              <a:t>SLIDE 14: Contribute to Operator Framework
+SPEAKER: OLM C — content, catalogs and contributions; name to confirm
+START: 17:30
 DURATION: 01:00
-STATUS: RESOURCE PACKAGE TO PREPARE
-TAKEAWAY: Use documented contracts and reproducible cases to guide contributions.
+STATUS: PROJECT DEVELOPMENT
+TAKEAWAY: Contribute to Operator Framework development.
 TALK TRACK / SOURCES / CAVEATS / REVIEW:
-The host closes on final slide 24, represented here by base record 14. Include verified resource routes for Operator Framework and Java Operator SDK in the final resource hub. Public URLs and QR codes need published destinations. Companion examples and vetted first-task links remain to be prepared. Give the audience a practical next-day contribution supported by the resource package. Speaker ownership stays in these notes. Sources: ../kubecon-2026-outline.md companion package; supplied feature-planning contribution candidates.
+Invite contributions to the Operator Framework project: documentation, focused tests, code, and reproducible migration, chart, or schema fixtures. Start with the repository contribution guide: https://github.com/operator-framework/operator-controller/blob/main/CONTRIBUTING.md. Identify an issue or discussion, provide a reproducible case, and describe the expected result.
 SOURCE CONTEXT ROOT: /Users/jordan/Documents/devel/breadcrumbs/2026-kubecon-wip
 </a:t>
             </a:r>
@@ -1109,14 +1112,14 @@
           <a:p>
             <a:r>
               <a:rPr lang="en-US" dirty="0"/>
-              <a:t>SLIDE 25: Questions?
-SPEAKER: OLM A/B/C on OLM; Attila on Java SDK only
-START: 28:00
-DURATION: 02:00
+              <a:t>SLIDE 15: Operator Framework: Java Operator SDK
+SPEAKER: OLM C — content, catalogs and contributions; name to confirm
+START: 18:30
+DURATION: 00:30
 STATUS: 
-TAKEAWAY: Questions about lifecycle APIs, packaging or controller behavior?
+TAKEAWAY: 
 TALK TRACK / SOURCES / CAVEATS / REVIEW:
-Final slide 25 is titled exactly Questions?. Base record 15 reserves two minutes for questions and transition overruns. A/B/C answer their OLM topics; Attila answers Java Operator SDK questions exclusively. The base segment totals 20 minutes, including this question allocation. Original SDK source slides 3–12 add ten minutes for a 30-minute session. Main slides occupy 28 minutes including the one-minute host close. Keep the no-live-demo plan. Source: ../kubecon-2026-outline.md run of show.
+C hands off to Attila for the Java Operator SDK section. OLM packaging supports operators written in any language; SDKs support controller implementation. Attila presents the ten authored SDK slides, unchanged, in approximately ten minutes.
 SOURCE CONTEXT ROOT: /Users/jordan/Documents/devel/breadcrumbs/2026-kubecon-wip
 </a:t>
             </a:r>
@@ -1142,6 +1145,200 @@
             <a:fld id="{F7021451-1387-4CA6-816F-3879F97B5CBC}" type="slidenum">
               <a:rPr lang="en-US"/>
               <a:t>15</a:t>
+            </a:fld>
+            <a:endParaRPr lang="en-US"/>
+          </a:p>
+        </p:txBody>
+      </p:sp>
+    </p:spTree>
+    <p:extLst>
+      <p:ext uri="{BB962C8B-B14F-4D97-AF65-F5344CB8AC3E}">
+        <p14:creationId xmlns:p14="http://schemas.microsoft.com/office/powerpoint/2010/main" val="1024086991"/>
+      </p:ext>
+    </p:extLst>
+  </p:cSld>
+  <p:clrMapOvr>
+    <a:masterClrMapping/>
+  </p:clrMapOvr>
+</p:notes>
+</file>
+
+<file path=ppt/notesSlides/notesSlide16.xml><?xml version="1.0" encoding="utf-8"?>
+<p:notes xmlns:a="http://schemas.openxmlformats.org/drawingml/2006/main" xmlns:r="http://schemas.openxmlformats.org/officeDocument/2006/relationships" xmlns:p="http://schemas.openxmlformats.org/presentationml/2006/main">
+  <p:cSld>
+    <p:spTree>
+      <p:nvGrpSpPr>
+        <p:cNvPr id="1" name=""/>
+        <p:cNvGrpSpPr/>
+        <p:nvPr/>
+      </p:nvGrpSpPr>
+      <p:grpSpPr>
+        <a:xfrm>
+          <a:off x="0" y="0"/>
+          <a:ext cx="0" cy="0"/>
+          <a:chOff x="0" y="0"/>
+          <a:chExt cx="0" cy="0"/>
+        </a:xfrm>
+      </p:grpSpPr>
+      <p:sp>
+        <p:nvSpPr>
+          <p:cNvPr id="2" name="Slide Image Placeholder 1"/>
+          <p:cNvSpPr>
+            <a:spLocks noGrp="1" noRot="1" noChangeAspect="1"/>
+          </p:cNvSpPr>
+          <p:nvPr>
+            <p:ph type="sldImg"/>
+          </p:nvPr>
+        </p:nvSpPr>
+        <p:spPr/>
+      </p:sp>
+      <p:sp>
+        <p:nvSpPr>
+          <p:cNvPr id="3" name="Notes Placeholder 2"/>
+          <p:cNvSpPr>
+            <a:spLocks noGrp="1"/>
+          </p:cNvSpPr>
+          <p:nvPr>
+            <p:ph type="body" idx="1"/>
+          </p:nvPr>
+        </p:nvSpPr>
+        <p:spPr/>
+        <p:txBody>
+          <a:bodyPr/>
+          <a:lstStyle/>
+          <a:p>
+            <a:r>
+              <a:rPr lang="en-US" dirty="0"/>
+              <a:t>SLIDE 26: Resources and contribution steps
+SPEAKER: OLM A — session host; name to confirm
+START: 29:00
+DURATION: 01:00
+STATUS: RESOURCE PACKAGE TO PREPARE
+TAKEAWAY: Use documented contracts and reproducible cases to guide contributions.
+TALK TRACK / SOURCES / CAVEATS / REVIEW:
+Close with the Operator Framework contribution guide, the OLM documentation, and the Java Operator SDK project. Companion demos are intended for online use; no live demo is planned. Confirm resource links before publication.
+SOURCE CONTEXT ROOT: /Users/jordan/Documents/devel/breadcrumbs/2026-kubecon-wip
+</a:t>
+            </a:r>
+            <a:endParaRPr lang="en-US" dirty="0"/>
+          </a:p>
+        </p:txBody>
+      </p:sp>
+      <p:sp>
+        <p:nvSpPr>
+          <p:cNvPr id="4" name="Slide Number Placeholder 3"/>
+          <p:cNvSpPr>
+            <a:spLocks noGrp="1"/>
+          </p:cNvSpPr>
+          <p:nvPr>
+            <p:ph type="sldNum" sz="quarter" idx="10"/>
+          </p:nvPr>
+        </p:nvSpPr>
+        <p:spPr/>
+        <p:txBody>
+          <a:bodyPr/>
+          <a:lstStyle/>
+          <a:p>
+            <a:fld id="{F7021451-1387-4CA6-816F-3879F97B5CBC}" type="slidenum">
+              <a:rPr lang="en-US"/>
+              <a:t>16</a:t>
+            </a:fld>
+            <a:endParaRPr lang="en-US"/>
+          </a:p>
+        </p:txBody>
+      </p:sp>
+    </p:spTree>
+    <p:extLst>
+      <p:ext uri="{BB962C8B-B14F-4D97-AF65-F5344CB8AC3E}">
+        <p14:creationId xmlns:p14="http://schemas.microsoft.com/office/powerpoint/2010/main" val="1024086991"/>
+      </p:ext>
+    </p:extLst>
+  </p:cSld>
+  <p:clrMapOvr>
+    <a:masterClrMapping/>
+  </p:clrMapOvr>
+</p:notes>
+</file>
+
+<file path=ppt/notesSlides/notesSlide17.xml><?xml version="1.0" encoding="utf-8"?>
+<p:notes xmlns:a="http://schemas.openxmlformats.org/drawingml/2006/main" xmlns:r="http://schemas.openxmlformats.org/officeDocument/2006/relationships" xmlns:p="http://schemas.openxmlformats.org/presentationml/2006/main">
+  <p:cSld>
+    <p:spTree>
+      <p:nvGrpSpPr>
+        <p:cNvPr id="1" name=""/>
+        <p:cNvGrpSpPr/>
+        <p:nvPr/>
+      </p:nvGrpSpPr>
+      <p:grpSpPr>
+        <a:xfrm>
+          <a:off x="0" y="0"/>
+          <a:ext cx="0" cy="0"/>
+          <a:chOff x="0" y="0"/>
+          <a:chExt cx="0" cy="0"/>
+        </a:xfrm>
+      </p:grpSpPr>
+      <p:sp>
+        <p:nvSpPr>
+          <p:cNvPr id="2" name="Slide Image Placeholder 1"/>
+          <p:cNvSpPr>
+            <a:spLocks noGrp="1" noRot="1" noChangeAspect="1"/>
+          </p:cNvSpPr>
+          <p:nvPr>
+            <p:ph type="sldImg"/>
+          </p:nvPr>
+        </p:nvSpPr>
+        <p:spPr/>
+      </p:sp>
+      <p:sp>
+        <p:nvSpPr>
+          <p:cNvPr id="3" name="Notes Placeholder 2"/>
+          <p:cNvSpPr>
+            <a:spLocks noGrp="1"/>
+          </p:cNvSpPr>
+          <p:nvPr>
+            <p:ph type="body" idx="1"/>
+          </p:nvPr>
+        </p:nvSpPr>
+        <p:spPr/>
+        <p:txBody>
+          <a:bodyPr/>
+          <a:lstStyle/>
+          <a:p>
+            <a:r>
+              <a:rPr lang="en-US" dirty="0"/>
+              <a:t>SLIDE 27: Questions?
+SPEAKER: OLM A/B/C and Attila — questions
+START: 30:00
+DURATION: 02:00
+STATUS: 
+TAKEAWAY: Questions about lifecycle APIs, packaging or controller behavior?
+TALK TRACK / SOURCES / CAVEATS / REVIEW:
+Reserve two minutes for questions and transition overruns. A/B/C answer OLM questions; Attila answers Java Operator SDK questions. The proposed total duration is 32 minutes.
+SOURCE CONTEXT ROOT: /Users/jordan/Documents/devel/breadcrumbs/2026-kubecon-wip
+</a:t>
+            </a:r>
+            <a:endParaRPr lang="en-US" dirty="0"/>
+          </a:p>
+        </p:txBody>
+      </p:sp>
+      <p:sp>
+        <p:nvSpPr>
+          <p:cNvPr id="4" name="Slide Number Placeholder 3"/>
+          <p:cNvSpPr>
+            <a:spLocks noGrp="1"/>
+          </p:cNvSpPr>
+          <p:nvPr>
+            <p:ph type="sldNum" sz="quarter" idx="10"/>
+          </p:nvPr>
+        </p:nvSpPr>
+        <p:spPr/>
+        <p:txBody>
+          <a:bodyPr/>
+          <a:lstStyle/>
+          <a:p>
+            <a:fld id="{F7021451-1387-4CA6-816F-3879F97B5CBC}" type="slidenum">
+              <a:rPr lang="en-US"/>
+              <a:t>17</a:t>
             </a:fld>
             <a:endParaRPr lang="en-US"/>
           </a:p>
@@ -1207,13 +1404,13 @@
             <a:r>
               <a:rPr lang="en-US" dirty="0"/>
               <a:t>SLIDE 2: Presentation team
-SPEAKER: OLM A — team introduction; name to confirm
+SPEAKER: OLM A — context and installation; name to confirm
 START: 00:45
 DURATION: 00:30
 STATUS: 
 TAKEAWAY: 
 TALK TRACK / SOURCES / CAVEATS / REVIEW:
-OLM A introduces Rashmi, Joe and Jordan as the OLM presentation team; photos are deferred. Introduce Attila as the fourth presenter, covering Java Operator SDK exclusively. The mapping of Rashmi, Joe and Jordan to OLM roles A/B/C remains unconfirmed. A covers base slides 1–4, B covers 5–9, and C covers 10–13. The primary builder imports original SDK source slides 3–12 unchanged after the divider, allocating 60 seconds to each. These become final slides 14–23; the host closes on final slide 24 and topic owners answer questions on final slide 25. Adding this team slide and removing the standalone assumptions slide preserves 15 base records and 25 displayed slides. The base records total 1,200 seconds; the original SDK segment adds 600 seconds for a 30-minute session. Keep the no-live-demo plan. Sources: ../kubecon-2026-outline.md; ../kubecon-2025-slide-context.md.
+Introduce Rashmi, Joe and Jordan as the OLM presentation team. Introduce Attila as the fourth speaker, covering Java Operator SDK. The mapping from A/B/C to individual OLM presenters remains to be confirmed. Photos are deferred. The session uses prepared examples without live demos.
 SOURCE CONTEXT ROOT: /Users/jordan/Documents/devel/breadcrumbs/2026-kubecon-wip
 </a:t>
             </a:r>
@@ -1304,7 +1501,7 @@
             <a:r>
               <a:rPr lang="en-US" dirty="0"/>
               <a:t>SLIDE 3: Compatibility and lifecycle foundations
-SPEAKER: OLM A — context / host; name to confirm
+SPEAKER: OLM A — context and installation; name to confirm
 START: 01:15
 DURATION: 01:30
 STATUS: FOUNDATIONAL WORK
@@ -1401,13 +1598,13 @@
             <a:r>
               <a:rPr lang="en-US" dirty="0"/>
               <a:t>SLIDE 4: OLM: past, current and future
-SPEAKER: OLM A — context / host; name to confirm
+SPEAKER: OLM A — context and installation; name to confirm
 START: 02:45
 DURATION: 01:15
 STATUS: EVOLUTION / PLANNED / FUTURE WORK
 TAKEAWAY: OLM feature evolution
 TALK TRACK / SOURCES / CAVEATS / REVIEW:
-Enumerate the timeline: past work includes OLMv0, SQLite catalogs and established file-based catalogs (FBC). Summarize OLMv0's flawed assumptions about namespace-local CRD visibility, independently managed APIs and watch-aware dependencies. CRD definitions are cluster-scoped shared APIs; custom resource instances may be namespaced, and controller watch scope is configured separately. Shared CRDs can couple operator upgrades. The flawed assumptions belonged to OLMv0's lifecycle model; Kubernetes' cluster-scoped CRD design is the underlying API boundary. Keep the OperatorGroup recap brief and explain how these lessons informed OLMv1. Current OLMv1 capabilities include ClusterExtension, version pins and webhooks. Ongoing development includes resource rollouts, user configuration, direct bundle installation and migration. Direct installation remains an open proposal in PR #2907 at the supplied 2026-10-09 check. Planned work includes Helm content using helm+v2 and v2 catalog schemas. OCI-native catalog storage and transport remain future work. Release-specific availability and feature gates require the source-version qualifications on the detailed slides. The 2025 deck already listed delivered features. A hands off to B after this overview at 04:00. Sources: ../kubecon-2025-slide-context.md slide 9; ../kubecon-2026-resource-assessment.md K-1/K-2/V0-2/V0-3; supplied feature-planning context.
+Enumerate the timeline: past work includes OLMv0, SQLite catalogs and established file-based catalogs (FBC). Summarize OLMv0's flawed assumptions about namespace-local CRD visibility, independently managed APIs and watch-aware dependencies. CRD definitions are cluster-scoped shared APIs; custom resource instances may be namespaced, and controller watch scope is configured separately. Shared CRDs can couple operator upgrades. The flawed assumptions belonged to OLMv0's lifecycle model; Kubernetes' cluster-scoped CRD design is the underlying API boundary. Keep the OperatorGroup recap brief and explain how these lessons informed OLMv1. Current OLMv1 capabilities include ClusterExtension, version pins and webhooks. Ongoing development includes resource rollouts, user configuration, direct bundle installation and migration. Direct installation remains an open proposal in PR #2907 at the supplied 2026-10-09 check. Planned work includes Helm content using helm+v2 and v2 catalog schemas. OCI-native catalog storage and transport remain future work. Release-specific availability and feature gates require the source-version qualifications on the detailed slides. The 2025 deck already listed delivered features. A continues with installation changes. Sources: ../kubecon-2025-slide-context.md slide 9; ../kubecon-2026-resource-assessment.md K-1/K-2/V0-2/V0-3; supplied feature-planning context.
 SOURCE CONTEXT ROOT: /Users/jordan/Documents/devel/breadcrumbs/2026-kubecon-wip
 </a:t>
             </a:r>
@@ -1497,14 +1694,14 @@
           <a:p>
             <a:r>
               <a:rPr lang="en-US" dirty="0"/>
-              <a:t>SLIDE 5: Install a bundle directly
-SPEAKER: OLM B — lifecycle primitives; name to confirm
+              <a:t>SLIDE 5: Streamlined Installation
+SPEAKER: OLM A — context and installation; name to confirm
 START: 04:00
-DURATION: 01:30
-STATUS: IN ACTIVE DEVELOPMENT / CONTROLLED BY FEATURE-GATE
-TAKEAWAY: Select a registry+v1 bundle by its OCI image reference.
+DURATION: 01:00
+STATUS: 
+TAKEAWAY: Standard channel since v1.11.0
 TALK TRACK / SOURCES / CAVEATS / REVIEW:
-PR #2907 is OPEN and unmerged as of the supplied check dated 2026-10-09. Present direct bundle installation as proposed behavior in active development. It supports registry+v1 bundles only and is controlled by the BoxcutterRuntime feature gate. The requested source uses sourceType: OCIImage and source.ociImage.ref. It bypasses catalog resolution. Describe CRD checks and other lifecycle safeguards according to the proposal's supported path; catalog bypass alone establishes no blanket removal of CRD safety. Pin the source revision and gate configuration before preparing an example. The session uses prepared examples without a live demo.
+As of operator-controller v1.11.0, the standard installation channel no longer requires spec.serviceAccount. The controller uses its own service account; the deprecated field is ignored. ClusterExtension write access is a high-privilege operation because the controller uses cluster-admin permissions. When delegating access, combine Kubernetes RBAC with appropriate admission policy, such as ValidatingAdmissionPolicy, to constrain allowed extensions. Source: https://github.com/operator-framework/operator-controller/pull/2770 and the v1.11.0 release notes.
 SOURCE CONTEXT ROOT: /Users/jordan/Documents/devel/breadcrumbs/2026-kubecon-wip
 </a:t>
             </a:r>
@@ -1594,14 +1791,15 @@
           <a:p>
             <a:r>
               <a:rPr lang="en-US" dirty="0"/>
-              <a:t>SLIDE 6: Inspect phased resource rollouts
-SPEAKER: OLM B — lifecycle primitives; name to confirm
-START: 05:30
-DURATION: 02:00
-STATUS: IN ACTIVE DEVELOPMENT / CONTROLLED BY FEATURE-GATE
-TAKEAWAY: Ordered phases expose resource application and readiness progress.
+              <a:t>SLIDE 6: Namespace Management
+SPEAKER: OLM A — context and installation; name to confirm
+START: 05:00
+DURATION: 01:00
+STATUS: 
+TAKEAWAY: Experimental channel since v1.12.0
+Controlled by feature gate
 TALK TRACK / SOURCES / CAVEATS / REVIEW:
-Explain the evolution from ClusterExtensionRevision to ClusterObjectSets. The ascending stair-step illustration shows resource readiness progressing toward the installation goal. Objects within a phase have unspecified ordering. Readiness checks cover defined conditions; application correctness and transactional availability require additional validation. The rollout runtime is in active development and controlled by feature-gate. Pin the source version and gate settings for examples. Reconcile draft Succeeded wording with the inspected Ready/completedAt type before using status examples. Sources: supplied ClusterObjectSets draft and feature-planning context; ../kubecon-2026-resource-assessment.md; ../kubecon-2025-slide-context.md slides 7, 10 and 12.
+Operator-controller v1.12.0 introduced optional spec.namespace in the experimental installation channel. With the feature-gated runtime, an explicitly supplied namespace remains user-managed. When the field is omitted, OLM derives and manages an install namespace using bundle metadata and defaults. Deleting the extension also deletes its managed namespace and all remaining objects in that namespace, including objects OLM did not install. Explain namespace-transition validation and verify the selected bundle and controller version before demonstrating. Sources: https://github.com/operator-framework/operator-controller/pull/2925, https://github.com/operator-framework/operator-controller/pull/2926, https://github.com/operator-framework/operator-controller/pull/2929.
 SOURCE CONTEXT ROOT: /Users/jordan/Documents/devel/breadcrumbs/2026-kubecon-wip
 </a:t>
             </a:r>
@@ -1691,14 +1889,14 @@
           <a:p>
             <a:r>
               <a:rPr lang="en-US" dirty="0"/>
-              <a:t>SLIDE 7: User control of extension deployments
-SPEAKER: OLM B — lifecycle primitives; name to confirm
-START: 07:30
-DURATION: 01:30
+              <a:t>SLIDE 7: Inspect phased resource rollouts
+SPEAKER: OLM B — lifecycle primitives and migration; name to confirm
+START: 06:00
+DURATION: 02:00
 STATUS: IN ACTIVE DEVELOPMENT / CONTROLLED BY FEATURE-GATE
-TAKEAWAY: Flexible user-defined deployment configuration.
+TAKEAWAY: Ordered phases expose resource application and readiness progress.
 TALK TRACK / SOURCES / CAVEATS / REVIEW:
-Describe the deployment as a configuration exchange between users and the operator team. Users express environment, resource, placement, volume and metadata requirements through the package's configuration interface. Operator authors define schema and validation behavior. OLM carries the selected configuration into the deployment. DeploymentConfig is in active development and controlled by feature-gate; values are expressed through ClusterExtension configuration. Explain field-specific merge, replace and append behavior and annotation precedence. Validate example input and inspect the resulting deployment against the pinned source version. Watch-namespace pass-through leaves CRDs shared and supplies no watch-aware dependency management. Sources: supplied customization draft; ../kubecon-2026-resource-assessment.md; ../kubecon-2025-slide-context.md slide 14.
+Explain the ClusterExtension → ClusterObjectDeployment → ClusterObjectSet ownership model. ClusterObjectDeployment manages rollout and revision history; ClusterObjectSets hold immutable revisions with ordered phases. observedPhases and other status details help identify stalled objects. Objects within a phase have no defined ordering. The API and rollout behavior are in active development and controlled by feature-gate. Standalone ClusterObjectDeployment use is in active development. A namespace-scoped ObjectDeployment is under consideration, with no committed availability. Sources: https://github.com/operator-framework/operator-controller/pull/3058 and https://github.com/operator-framework/operator-controller/pull/3072.
 SOURCE CONTEXT ROOT: /Users/jordan/Documents/devel/breadcrumbs/2026-kubecon-wip
 </a:t>
             </a:r>
@@ -1788,14 +1986,14 @@
           <a:p>
             <a:r>
               <a:rPr lang="en-US" dirty="0"/>
-              <a:t>SLIDE 8: OLMv0 → OLMv1 migration
-SPEAKER: OLM B — lifecycle primitives; name to confirm
-START: 09:00
-DURATION: 02:00
-STATUS: IN ACTIVE DEVELOPMENT
-TAKEAWAY: Move operator management from OLMv0 to OLMv1.
+              <a:t>SLIDE 8: User control of extension deployments
+SPEAKER: OLM B — lifecycle primitives and migration; name to confirm
+START: 08:00
+DURATION: 01:30
+STATUS: IN ACTIVE DEVELOPMENT / CONTROLLED BY FEATURE-GATE
+TAKEAWAY: Flexible user-defined deployment configuration.
 TALK TRACK / SOURCES / CAVEATS / REVIEW:
-Prepare OLMv1 ClusterCatalogs from the existing OLMv0 CatalogSources first. Then evaluate each operator installation for eligibility and preview its migration before transferring management. The check and preview actions evaluate operators; catalog preparation is the earlier prerequisite. The migration specification describes check, convert, rollback and cleanup with ClusterObjectSets. Functionality is supplied as library-olm. The example binaries illustrate library use. The user confirms structured output that supports automated processing, including models; it has not been independently exercised in this editing task. Eligibility checks have defined coverage. Retaining the namespace can reduce disruption; namespace changes may restart workloads or cause downtime. Validate recovery boundaries and source/gate versions for the selected case. This area is in active development. Sources: library-olm README/spec; ../kubecon-2026-resource-assessment.md; user migration guidance.
+Describe the deployment as a configuration exchange between users and the operator team. Users express environment, resource, placement, volume and metadata requirements through the package's configuration interface. Operator authors define schema and validation behavior. OLM carries the selected configuration into the deployment. DeploymentConfig is in active development and controlled by feature-gate; values are expressed through ClusterExtension configuration. Explain field-specific merge, replace and append behavior and annotation precedence. Validate example input and inspect the resulting deployment against the pinned source version. Watch-namespace pass-through leaves CRDs shared and supplies no watch-aware dependency management. Sources: supplied customization draft; ../kubecon-2026-resource-assessment.md; ../kubecon-2025-slide-context.md slide 14.
 SOURCE CONTEXT ROOT: /Users/jordan/Documents/devel/breadcrumbs/2026-kubecon-wip
 </a:t>
             </a:r>
@@ -1885,14 +2083,15 @@
           <a:p>
             <a:r>
               <a:rPr lang="en-US" dirty="0"/>
-              <a:t>SLIDE 9: Shared lifecycle logic in library-olm
-SPEAKER: OLM B — lifecycle primitives; name to confirm
-START: 11:00
-DURATION: 01:00
+              <a:t>SLIDE 9: OLMv0 → OLMv1 migration
+SPEAKER: OLM B — lifecycle primitives and migration; name to confirm
+START: 09:30
+DURATION: 02:00
 STATUS: IN ACTIVE DEVELOPMENT
-TAKEAWAY: Reuse lifecycle logic through a library with explicit contracts.
+TAKEAWAY: Move operator management from OLMv0 to OLMv1.
 TALK TRACK / SOURCES / CAVEATS / REVIEW:
-Describe library reuse, the current migration development examples and fixtures that record inputs and expected results. The example binaries exercise library behavior and provide contribution starting points. Broader controller, CLI and UI consumption remains a design intent requiring implementation evidence and explicit contracts. Successor semantics need a defined contract. Fixtures can cover legacy input or version/release selection while respecting the proposed v2 schema direction. Pin source versions when documenting examples. B hands off to C after this slide at 12:00. Sources: library-olm README/spec; supplied feature-planning context; ../kubecon-2025-slide-context.md slide 13.
+Prepare OLMv1 ClusterCatalogs from the existing OLMv0 CatalogSources first. Then evaluate each operator installation for eligibility and preview its migration before transferring management. The check and preview actions evaluate operators; catalog preparation is the earlier prerequisite. The migration specification describes check, convert, rollback and cleanup with ClusterObjectSets. Functionality is supplied as library-olm. The example binaries illustrate library use. The example binaries produce structured output for automation and model consumers. The companion migration scenario exercises JSON Lines output. Eligibility checks have defined coverage. Retaining the namespace can reduce disruption; namespace changes may restart workloads or cause downtime. Validate recovery boundaries and source/gate versions for the selected case. This area is in active development. Sources: library-olm README/spec; ../kubecon-2026-resource-assessment.md; user migration guidance.
+Note: Ask Todd to make a separate repo for the binaries (naming is hard :))
 SOURCE CONTEXT ROOT: /Users/jordan/Documents/devel/breadcrumbs/2026-kubecon-wip
 </a:t>
             </a:r>
@@ -2405,7 +2604,7 @@
                 <a:ea typeface="Arial" pitchFamily="34" charset="-122"/>
                 <a:cs typeface="Arial" pitchFamily="34" charset="-120"/>
               </a:rPr>
-              <a:t>1 / 25</a:t>
+              <a:t>1 / 27</a:t>
             </a:r>
             <a:endParaRPr lang="en-US" sz="850" dirty="0"/>
           </a:p>
@@ -2479,7 +2678,7 @@
                 <a:ea typeface="Arial" pitchFamily="34" charset="-122"/>
                 <a:cs typeface="Arial" pitchFamily="34" charset="-120"/>
               </a:rPr>
-              <a:t>Planned Helm content support</a:t>
+              <a:t>Install a bundle directly</a:t>
             </a:r>
             <a:endParaRPr lang="en-US" sz="2800" dirty="0"/>
           </a:p>
@@ -2494,7 +2693,7 @@
         <p:spPr>
           <a:xfrm>
             <a:off x="355550" y="1104900"/>
-            <a:ext cx="1459855" cy="253752"/>
+            <a:ext cx="4061371" cy="253752"/>
           </a:xfrm>
           <a:prstGeom prst="rect">
             <a:avLst/>
@@ -2524,7 +2723,7 @@
         <p:spPr>
           <a:xfrm>
             <a:off x="469850" y="1168301"/>
-            <a:ext cx="1255880" cy="126950"/>
+            <a:ext cx="3909426" cy="126950"/>
           </a:xfrm>
           <a:prstGeom prst="rect">
             <a:avLst/>
@@ -2551,7 +2750,7 @@
                 <a:ea typeface="Arial" pitchFamily="34" charset="-122"/>
                 <a:cs typeface="Arial" pitchFamily="34" charset="-120"/>
               </a:rPr>
-              <a:t>PLANNED / helm+v2</a:t>
+              <a:t>IN ACTIVE DEVELOPMENT / CONTROLLED BY FEATURE-GATE</a:t>
             </a:r>
             <a:endParaRPr lang="en-US" sz="1000" dirty="0"/>
           </a:p>
@@ -2596,7 +2795,7 @@
                 <a:ea typeface="Arial" pitchFamily="34" charset="-122"/>
                 <a:cs typeface="Arial" pitchFamily="34" charset="-120"/>
               </a:rPr>
-              <a:t>The rendering contract targets deterministic chart behavior.</a:t>
+              <a:t>Select a registry+v1 bundle by its OCI image reference.</a:t>
             </a:r>
             <a:endParaRPr lang="en-US" sz="1850" dirty="0"/>
           </a:p>
@@ -2611,7 +2810,7 @@
         <p:spPr>
           <a:xfrm>
             <a:off x="355550" y="2180332"/>
-            <a:ext cx="3632150" cy="1579959"/>
+            <a:ext cx="3632150" cy="891480"/>
           </a:xfrm>
           <a:prstGeom prst="rect">
             <a:avLst/>
@@ -2642,7 +2841,7 @@
                 <a:ea typeface="Arial" pitchFamily="34" charset="-122"/>
                 <a:cs typeface="Arial" pitchFamily="34" charset="-120"/>
               </a:rPr>
-              <a:t>Chart and values produce managed manifests</a:t>
+              <a:t>Use sourceType: OCIImage</a:t>
             </a:r>
             <a:endParaRPr lang="en-US" sz="1600" dirty="0"/>
           </a:p>
@@ -2666,7 +2865,7 @@
                 <a:ea typeface="Arial" pitchFamily="34" charset="-122"/>
                 <a:cs typeface="Arial" pitchFamily="34" charset="-120"/>
               </a:rPr>
-              <a:t>Allow-listed features support reproducible rendering</a:t>
+              <a:t>Set source.ociImage.ref</a:t>
             </a:r>
             <a:endParaRPr lang="en-US" sz="1600" dirty="0"/>
           </a:p>
@@ -2690,7 +2889,7 @@
                 <a:ea typeface="Arial" pitchFamily="34" charset="-122"/>
                 <a:cs typeface="Arial" pitchFamily="34" charset="-120"/>
               </a:rPr>
-              <a:t>helm+v2 identifies the content representation</a:t>
+              <a:t>Bypass catalog resolution</a:t>
             </a:r>
             <a:endParaRPr lang="en-US" sz="1600" dirty="0"/>
           </a:p>
@@ -2698,7 +2897,7 @@
       </p:sp>
       <p:pic>
         <p:nvPicPr>
-          <p:cNvPr id="7" name="Image 0" descr="/Users/jordan/Documents/devel/breadcrumbs/2026-kubecon-wip/dry-run/theme/assets/s10.png">    </p:cNvPr>
+          <p:cNvPr id="7" name="Image 0" descr="/Users/jordan/Documents/devel/breadcrumbs/2026-kubecon-wip/dry-run/theme/assets/s05.png">    </p:cNvPr>
           <p:cNvPicPr>
             <a:picLocks noChangeAspect="1"/>
           </p:cNvPicPr>
@@ -2756,7 +2955,7 @@
                 <a:ea typeface="Arial" pitchFamily="34" charset="-122"/>
                 <a:cs typeface="Arial" pitchFamily="34" charset="-120"/>
               </a:rPr>
-              <a:t>Standard chart artifacts use a defined rendering contract.</a:t>
+              <a:t>Proposed in open PR #2907; controlled by BoxcutterRuntime.</a:t>
             </a:r>
             <a:endParaRPr lang="en-US" sz="1050" dirty="0"/>
           </a:p>
@@ -2798,7 +2997,7 @@
                 <a:ea typeface="Arial" pitchFamily="34" charset="-122"/>
                 <a:cs typeface="Arial" pitchFamily="34" charset="-120"/>
               </a:rPr>
-              <a:t>10 / 25</a:t>
+              <a:t>10 / 27</a:t>
             </a:r>
             <a:endParaRPr lang="en-US" sz="850" dirty="0"/>
           </a:p>
@@ -2872,7 +3071,7 @@
                 <a:ea typeface="Arial" pitchFamily="34" charset="-122"/>
                 <a:cs typeface="Arial" pitchFamily="34" charset="-120"/>
               </a:rPr>
-              <a:t>Catalog performance and content types</a:t>
+              <a:t>Planned Helm content support</a:t>
             </a:r>
             <a:endParaRPr lang="en-US" sz="2800" dirty="0"/>
           </a:p>
@@ -2887,7 +3086,7 @@
         <p:spPr>
           <a:xfrm>
             <a:off x="355550" y="1104900"/>
-            <a:ext cx="1900386" cy="253752"/>
+            <a:ext cx="1459855" cy="253752"/>
           </a:xfrm>
           <a:prstGeom prst="rect">
             <a:avLst/>
@@ -2917,7 +3116,7 @@
         <p:spPr>
           <a:xfrm>
             <a:off x="469850" y="1168301"/>
-            <a:ext cx="1705222" cy="126950"/>
+            <a:ext cx="1255880" cy="126950"/>
           </a:xfrm>
           <a:prstGeom prst="rect">
             <a:avLst/>
@@ -2944,7 +3143,7 @@
                 <a:ea typeface="Arial" pitchFamily="34" charset="-122"/>
                 <a:cs typeface="Arial" pitchFamily="34" charset="-120"/>
               </a:rPr>
-              <a:t>PLANNED / FUTURE WORK</a:t>
+              <a:t>PLANNED / helm+v2</a:t>
             </a:r>
             <a:endParaRPr lang="en-US" sz="1000" dirty="0"/>
           </a:p>
@@ -2959,7 +3158,7 @@
         <p:spPr>
           <a:xfrm>
             <a:off x="355550" y="1524000"/>
-            <a:ext cx="3704793" cy="775097"/>
+            <a:ext cx="3704793" cy="516731"/>
           </a:xfrm>
           <a:prstGeom prst="rect">
             <a:avLst/>
@@ -2989,7 +3188,7 @@
                 <a:ea typeface="Arial" pitchFamily="34" charset="-122"/>
                 <a:cs typeface="Arial" pitchFamily="34" charset="-120"/>
               </a:rPr>
-              <a:t>Design for lower catalog-processing cost and additional content types.</a:t>
+              <a:t>The rendering contract targets deterministic chart behavior.</a:t>
             </a:r>
             <a:endParaRPr lang="en-US" sz="1850" dirty="0"/>
           </a:p>
@@ -3003,8 +3202,8 @@
         </p:nvSpPr>
         <p:spPr>
           <a:xfrm>
-            <a:off x="355550" y="2438698"/>
-            <a:ext cx="3632150" cy="1350466"/>
+            <a:off x="355550" y="2180332"/>
+            <a:ext cx="3632150" cy="1579959"/>
           </a:xfrm>
           <a:prstGeom prst="rect">
             <a:avLst/>
@@ -3035,7 +3234,7 @@
                 <a:ea typeface="Arial" pitchFamily="34" charset="-122"/>
                 <a:cs typeface="Arial" pitchFamily="34" charset="-120"/>
               </a:rPr>
-              <a:t>Lower duplicated CSV metadata</a:t>
+              <a:t>Chart and values produce managed manifests</a:t>
             </a:r>
             <a:endParaRPr lang="en-US" sz="1600" dirty="0"/>
           </a:p>
@@ -3059,7 +3258,7 @@
                 <a:ea typeface="Arial" pitchFamily="34" charset="-122"/>
                 <a:cs typeface="Arial" pitchFamily="34" charset="-120"/>
               </a:rPr>
-              <a:t>Direct version fields reduce property traversal</a:t>
+              <a:t>Allow-listed features support reproducible rendering</a:t>
             </a:r>
             <a:endParaRPr lang="en-US" sz="1600" dirty="0"/>
           </a:p>
@@ -3083,7 +3282,7 @@
                 <a:ea typeface="Arial" pitchFamily="34" charset="-122"/>
                 <a:cs typeface="Arial" pitchFamily="34" charset="-120"/>
               </a:rPr>
-              <a:t>Typed registry+v1 and helm+v2 content</a:t>
+              <a:t>helm+v2 identifies the content representation</a:t>
             </a:r>
             <a:endParaRPr lang="en-US" sz="1600" dirty="0"/>
           </a:p>
@@ -3091,7 +3290,7 @@
       </p:sp>
       <p:pic>
         <p:nvPicPr>
-          <p:cNvPr id="7" name="Image 0" descr="/Users/jordan/Documents/devel/breadcrumbs/2026-kubecon-wip/dry-run/theme/assets/s11.png">    </p:cNvPr>
+          <p:cNvPr id="7" name="Image 0" descr="/Users/jordan/Documents/devel/breadcrumbs/2026-kubecon-wip/dry-run/theme/assets/s10.png">    </p:cNvPr>
           <p:cNvPicPr>
             <a:picLocks noChangeAspect="1"/>
           </p:cNvPicPr>
@@ -3149,7 +3348,7 @@
                 <a:ea typeface="Arial" pitchFamily="34" charset="-122"/>
                 <a:cs typeface="Arial" pitchFamily="34" charset="-120"/>
               </a:rPr>
-              <a:t>File-based catalogs remain the established foundation.</a:t>
+              <a:t>Standard chart artifacts use a defined rendering contract.</a:t>
             </a:r>
             <a:endParaRPr lang="en-US" sz="1050" dirty="0"/>
           </a:p>
@@ -3191,7 +3390,7 @@
                 <a:ea typeface="Arial" pitchFamily="34" charset="-122"/>
                 <a:cs typeface="Arial" pitchFamily="34" charset="-120"/>
               </a:rPr>
-              <a:t>11 / 25</a:t>
+              <a:t>11 / 27</a:t>
             </a:r>
             <a:endParaRPr lang="en-US" sz="850" dirty="0"/>
           </a:p>
@@ -3265,7 +3464,7 @@
                 <a:ea typeface="Arial" pitchFamily="34" charset="-122"/>
                 <a:cs typeface="Arial" pitchFamily="34" charset="-120"/>
               </a:rPr>
-              <a:t>Contribute to Operator Framework</a:t>
+              <a:t>Catalog performance and content types</a:t>
             </a:r>
             <a:endParaRPr lang="en-US" sz="2800" dirty="0"/>
           </a:p>
@@ -3280,7 +3479,7 @@
         <p:spPr>
           <a:xfrm>
             <a:off x="355550" y="1104900"/>
-            <a:ext cx="1830139" cy="253752"/>
+            <a:ext cx="1900386" cy="253752"/>
           </a:xfrm>
           <a:prstGeom prst="rect">
             <a:avLst/>
@@ -3310,7 +3509,7 @@
         <p:spPr>
           <a:xfrm>
             <a:off x="469850" y="1168301"/>
-            <a:ext cx="1633570" cy="126950"/>
+            <a:ext cx="1705222" cy="126950"/>
           </a:xfrm>
           <a:prstGeom prst="rect">
             <a:avLst/>
@@ -3337,7 +3536,7 @@
                 <a:ea typeface="Arial" pitchFamily="34" charset="-122"/>
                 <a:cs typeface="Arial" pitchFamily="34" charset="-120"/>
               </a:rPr>
-              <a:t>PROJECT DEVELOPMENT</a:t>
+              <a:t>PLANNED / FUTURE WORK</a:t>
             </a:r>
             <a:endParaRPr lang="en-US" sz="1000" dirty="0"/>
           </a:p>
@@ -3382,7 +3581,7 @@
                 <a:ea typeface="Arial" pitchFamily="34" charset="-122"/>
                 <a:cs typeface="Arial" pitchFamily="34" charset="-120"/>
               </a:rPr>
-              <a:t>Help develop the project through documentation, code and test cases.</a:t>
+              <a:t>Design for lower catalog-processing cost and additional content types.</a:t>
             </a:r>
             <a:endParaRPr lang="en-US" sz="1850" dirty="0"/>
           </a:p>
@@ -3428,7 +3627,7 @@
                 <a:ea typeface="Arial" pitchFamily="34" charset="-122"/>
                 <a:cs typeface="Arial" pitchFamily="34" charset="-120"/>
               </a:rPr>
-              <a:t>Improve documentation and examples</a:t>
+              <a:t>Lower duplicated CSV metadata</a:t>
             </a:r>
             <a:endParaRPr lang="en-US" sz="1600" dirty="0"/>
           </a:p>
@@ -3452,7 +3651,7 @@
                 <a:ea typeface="Arial" pitchFamily="34" charset="-122"/>
                 <a:cs typeface="Arial" pitchFamily="34" charset="-120"/>
               </a:rPr>
-              <a:t>Contribute code and focused tests</a:t>
+              <a:t>Direct version fields reduce property traversal</a:t>
             </a:r>
             <a:endParaRPr lang="en-US" sz="1600" dirty="0"/>
           </a:p>
@@ -3476,7 +3675,7 @@
                 <a:ea typeface="Arial" pitchFamily="34" charset="-122"/>
                 <a:cs typeface="Arial" pitchFamily="34" charset="-120"/>
               </a:rPr>
-              <a:t>Add migration, chart and schema fixtures</a:t>
+              <a:t>Typed registry+v1 and helm+v2 content</a:t>
             </a:r>
             <a:endParaRPr lang="en-US" sz="1600" dirty="0"/>
           </a:p>
@@ -3484,7 +3683,7 @@
       </p:sp>
       <p:pic>
         <p:nvPicPr>
-          <p:cNvPr id="7" name="Image 0" descr="/Users/jordan/Documents/devel/breadcrumbs/2026-kubecon-wip/dry-run/theme/assets/s12.png">    </p:cNvPr>
+          <p:cNvPr id="7" name="Image 0" descr="/Users/jordan/Documents/devel/breadcrumbs/2026-kubecon-wip/dry-run/theme/assets/s11.png">    </p:cNvPr>
           <p:cNvPicPr>
             <a:picLocks noChangeAspect="1"/>
           </p:cNvPicPr>
@@ -3542,7 +3741,7 @@
                 <a:ea typeface="Arial" pitchFamily="34" charset="-122"/>
                 <a:cs typeface="Arial" pitchFamily="34" charset="-120"/>
               </a:rPr>
-              <a:t>Start with a reproducible case and a clear expected result.</a:t>
+              <a:t>File-based catalogs remain the established foundation.</a:t>
             </a:r>
             <a:endParaRPr lang="en-US" sz="1050" dirty="0"/>
           </a:p>
@@ -3584,7 +3783,7 @@
                 <a:ea typeface="Arial" pitchFamily="34" charset="-122"/>
                 <a:cs typeface="Arial" pitchFamily="34" charset="-120"/>
               </a:rPr>
-              <a:t>12 / 25</a:t>
+              <a:t>12 / 27</a:t>
             </a:r>
             <a:endParaRPr lang="en-US" sz="850" dirty="0"/>
           </a:p>
@@ -3630,8 +3829,8 @@
         </p:nvSpPr>
         <p:spPr>
           <a:xfrm>
-            <a:off x="944782" y="1739801"/>
-            <a:ext cx="7254139" cy="992981"/>
+            <a:off x="311646" y="444996"/>
+            <a:ext cx="8601405" cy="507950"/>
           </a:xfrm>
           <a:prstGeom prst="rect">
             <a:avLst/>
@@ -3643,14 +3842,14 @@
           <a:bodyPr wrap="square" lIns="0" tIns="0" rIns="0" bIns="0" rtlCol="0" anchor="t"/>
           <a:lstStyle/>
           <a:p>
-            <a:pPr algn="ctr" indent="0" marL="0">
-              <a:lnSpc>
-                <a:spcPts val="3910"/>
-              </a:lnSpc>
-              <a:buNone/>
-            </a:pPr>
-            <a:r>
-              <a:rPr lang="en-US" sz="3400" b="1" dirty="0">
+            <a:pPr algn="l" indent="0" marL="0">
+              <a:lnSpc>
+                <a:spcPts val="3192"/>
+              </a:lnSpc>
+              <a:buNone/>
+            </a:pPr>
+            <a:r>
+              <a:rPr lang="en-US" sz="2800" b="1" dirty="0">
                 <a:solidFill>
                   <a:srgbClr val="00144C"/>
                 </a:solidFill>
@@ -3658,9 +3857,9 @@
                 <a:ea typeface="Arial" pitchFamily="34" charset="-122"/>
                 <a:cs typeface="Arial" pitchFamily="34" charset="-120"/>
               </a:rPr>
-              <a:t>Operator Framework: Java Operator SDK</a:t>
-            </a:r>
-            <a:endParaRPr lang="en-US" sz="3400" dirty="0"/>
+              <a:t>Shared lifecycle logic in library-olm</a:t>
+            </a:r>
+            <a:endParaRPr lang="en-US" sz="2800" dirty="0"/>
           </a:p>
         </p:txBody>
       </p:sp>
@@ -3672,8 +3871,38 @@
         </p:nvSpPr>
         <p:spPr>
           <a:xfrm>
-            <a:off x="8244233" y="4940201"/>
-            <a:ext cx="544068" cy="114300"/>
+            <a:off x="355550" y="1104900"/>
+            <a:ext cx="1853505" cy="253752"/>
+          </a:xfrm>
+          <a:prstGeom prst="rect">
+            <a:avLst/>
+          </a:prstGeom>
+          <a:solidFill>
+            <a:srgbClr val="E3F6FF"/>
+          </a:solidFill>
+          <a:ln/>
+        </p:spPr>
+        <p:txBody>
+          <a:bodyPr wrap="square" rtlCol="0" anchor="ctr"/>
+          <a:lstStyle/>
+          <a:p>
+            <a:pPr indent="0" marL="0">
+              <a:buNone/>
+            </a:pPr>
+            <a:endParaRPr lang="en-US" dirty="0"/>
+          </a:p>
+        </p:txBody>
+      </p:sp>
+      <p:sp>
+        <p:nvSpPr>
+          <p:cNvPr id="4" name="Text 2"/>
+          <p:cNvSpPr/>
+          <p:nvPr/>
+        </p:nvSpPr>
+        <p:spPr>
+          <a:xfrm>
+            <a:off x="469850" y="1168301"/>
+            <a:ext cx="1657404" cy="126950"/>
           </a:xfrm>
           <a:prstGeom prst="rect">
             <a:avLst/>
@@ -3685,19 +3914,269 @@
           <a:bodyPr wrap="square" lIns="0" tIns="0" rIns="0" bIns="0" rtlCol="0" anchor="t"/>
           <a:lstStyle/>
           <a:p>
-            <a:pPr algn="r" indent="0" marL="0">
-              <a:buNone/>
-            </a:pPr>
-            <a:r>
-              <a:rPr lang="en-US" sz="850" dirty="0">
-                <a:solidFill>
-                  <a:srgbClr val="052243"/>
+            <a:pPr algn="l" indent="0" marL="0">
+              <a:lnSpc>
+                <a:spcPts val="1000"/>
+              </a:lnSpc>
+              <a:buNone/>
+            </a:pPr>
+            <a:r>
+              <a:rPr lang="en-US" sz="1000" b="1" dirty="0">
+                <a:solidFill>
+                  <a:srgbClr val="00144C"/>
                 </a:solidFill>
                 <a:latin typeface="Arial" pitchFamily="34" charset="0"/>
                 <a:ea typeface="Arial" pitchFamily="34" charset="-122"/>
                 <a:cs typeface="Arial" pitchFamily="34" charset="-120"/>
               </a:rPr>
-              <a:t>13 / 25</a:t>
+              <a:t>IN ACTIVE DEVELOPMENT</a:t>
+            </a:r>
+            <a:endParaRPr lang="en-US" sz="1000" dirty="0"/>
+          </a:p>
+        </p:txBody>
+      </p:sp>
+      <p:sp>
+        <p:nvSpPr>
+          <p:cNvPr id="5" name="Text 3"/>
+          <p:cNvSpPr/>
+          <p:nvPr/>
+        </p:nvSpPr>
+        <p:spPr>
+          <a:xfrm>
+            <a:off x="355550" y="1524000"/>
+            <a:ext cx="3704793" cy="516731"/>
+          </a:xfrm>
+          <a:prstGeom prst="rect">
+            <a:avLst/>
+          </a:prstGeom>
+          <a:noFill/>
+          <a:ln/>
+        </p:spPr>
+        <p:txBody>
+          <a:bodyPr wrap="square" lIns="0" tIns="0" rIns="0" bIns="0" rtlCol="0" anchor="t"/>
+          <a:lstStyle/>
+          <a:p>
+            <a:pPr algn="l" indent="0" marL="0">
+              <a:lnSpc>
+                <a:spcPts val="2035"/>
+              </a:lnSpc>
+              <a:spcAft>
+                <a:spcPts val="1100"/>
+              </a:spcAft>
+              <a:buNone/>
+            </a:pPr>
+            <a:r>
+              <a:rPr lang="en-US" sz="1850" b="1" dirty="0">
+                <a:solidFill>
+                  <a:srgbClr val="052243"/>
+                </a:solidFill>
+                <a:latin typeface="Arial" pitchFamily="34" charset="0"/>
+                <a:ea typeface="Arial" pitchFamily="34" charset="-122"/>
+                <a:cs typeface="Arial" pitchFamily="34" charset="-120"/>
+              </a:rPr>
+              <a:t>Reuse lifecycle logic through a library with explicit contracts.</a:t>
+            </a:r>
+            <a:endParaRPr lang="en-US" sz="1850" dirty="0"/>
+          </a:p>
+        </p:txBody>
+      </p:sp>
+      <p:sp>
+        <p:nvSpPr>
+          <p:cNvPr id="6" name="Text 4"/>
+          <p:cNvSpPr/>
+          <p:nvPr/>
+        </p:nvSpPr>
+        <p:spPr>
+          <a:xfrm>
+            <a:off x="355550" y="2180332"/>
+            <a:ext cx="3632150" cy="1579959"/>
+          </a:xfrm>
+          <a:prstGeom prst="rect">
+            <a:avLst/>
+          </a:prstGeom>
+          <a:noFill/>
+          <a:ln/>
+        </p:spPr>
+        <p:txBody>
+          <a:bodyPr wrap="square" lIns="107950" tIns="0" rIns="0" bIns="0" rtlCol="0" anchor="t"/>
+          <a:lstStyle/>
+          <a:p>
+            <a:pPr algn="l" marL="107950" indent="-107950">
+              <a:lnSpc>
+                <a:spcPts val="1808"/>
+              </a:lnSpc>
+              <a:spcAft>
+                <a:spcPts val="800"/>
+              </a:spcAft>
+              <a:buSzPct val="100000"/>
+              <a:buChar char="•"/>
+            </a:pPr>
+            <a:r>
+              <a:rPr lang="en-US" sz="1600" dirty="0">
+                <a:solidFill>
+                  <a:srgbClr val="052243"/>
+                </a:solidFill>
+                <a:latin typeface="Arial" pitchFamily="34" charset="0"/>
+                <a:ea typeface="Arial" pitchFamily="34" charset="-122"/>
+                <a:cs typeface="Arial" pitchFamily="34" charset="-120"/>
+              </a:rPr>
+              <a:t>Share migration checks and workflow logic</a:t>
+            </a:r>
+            <a:endParaRPr lang="en-US" sz="1600" dirty="0"/>
+          </a:p>
+          <a:p>
+            <a:pPr algn="l" marL="107950" indent="-107950">
+              <a:lnSpc>
+                <a:spcPts val="1808"/>
+              </a:lnSpc>
+              <a:spcAft>
+                <a:spcPts val="800"/>
+              </a:spcAft>
+              <a:buSzPct val="100000"/>
+              <a:buChar char="•"/>
+            </a:pPr>
+            <a:r>
+              <a:rPr lang="en-US" sz="1600" dirty="0">
+                <a:solidFill>
+                  <a:srgbClr val="052243"/>
+                </a:solidFill>
+                <a:latin typeface="Arial" pitchFamily="34" charset="0"/>
+                <a:ea typeface="Arial" pitchFamily="34" charset="-122"/>
+                <a:cs typeface="Arial" pitchFamily="34" charset="-120"/>
+              </a:rPr>
+              <a:t>Exercise current development examples</a:t>
+            </a:r>
+            <a:endParaRPr lang="en-US" sz="1600" dirty="0"/>
+          </a:p>
+          <a:p>
+            <a:pPr algn="l" marL="107950" indent="-107950">
+              <a:lnSpc>
+                <a:spcPts val="1808"/>
+              </a:lnSpc>
+              <a:spcAft>
+                <a:spcPts val="800"/>
+              </a:spcAft>
+              <a:buSzPct val="100000"/>
+              <a:buChar char="•"/>
+            </a:pPr>
+            <a:r>
+              <a:rPr lang="en-US" sz="1600" dirty="0">
+                <a:solidFill>
+                  <a:srgbClr val="052243"/>
+                </a:solidFill>
+                <a:latin typeface="Arial" pitchFamily="34" charset="0"/>
+                <a:ea typeface="Arial" pitchFamily="34" charset="-122"/>
+                <a:cs typeface="Arial" pitchFamily="34" charset="-120"/>
+              </a:rPr>
+              <a:t>Record expected results in reusable fixtures</a:t>
+            </a:r>
+            <a:endParaRPr lang="en-US" sz="1600" dirty="0"/>
+          </a:p>
+        </p:txBody>
+      </p:sp>
+      <p:pic>
+        <p:nvPicPr>
+          <p:cNvPr id="7" name="Image 0" descr="/Users/jordan/Documents/devel/breadcrumbs/2026-kubecon-wip/dry-run/theme/assets/s09.png">    </p:cNvPr>
+          <p:cNvPicPr>
+            <a:picLocks noChangeAspect="1"/>
+          </p:cNvPicPr>
+          <p:nvPr/>
+        </p:nvPicPr>
+        <p:blipFill>
+          <a:blip r:embed="rId1"/>
+          <a:stretch>
+            <a:fillRect/>
+          </a:stretch>
+        </p:blipFill>
+        <p:spPr>
+          <a:xfrm>
+            <a:off x="4292501" y="1460450"/>
+            <a:ext cx="4495800" cy="2997101"/>
+          </a:xfrm>
+          <a:prstGeom prst="rect">
+            <a:avLst/>
+          </a:prstGeom>
+        </p:spPr>
+      </p:pic>
+      <p:sp>
+        <p:nvSpPr>
+          <p:cNvPr id="8" name="Text 5"/>
+          <p:cNvSpPr/>
+          <p:nvPr/>
+        </p:nvSpPr>
+        <p:spPr>
+          <a:xfrm>
+            <a:off x="1968401" y="4711601"/>
+            <a:ext cx="6217920" cy="304800"/>
+          </a:xfrm>
+          <a:prstGeom prst="rect">
+            <a:avLst/>
+          </a:prstGeom>
+          <a:noFill/>
+          <a:ln/>
+        </p:spPr>
+        <p:txBody>
+          <a:bodyPr wrap="square" lIns="0" tIns="0" rIns="0" bIns="0" rtlCol="0" anchor="t"/>
+          <a:lstStyle/>
+          <a:p>
+            <a:pPr algn="l" indent="0" marL="0">
+              <a:lnSpc>
+                <a:spcPts val="1176"/>
+              </a:lnSpc>
+              <a:buNone/>
+            </a:pPr>
+            <a:r>
+              <a:rPr lang="en-US" sz="1050" i="1" dirty="0">
+                <a:solidFill>
+                  <a:srgbClr val="052243"/>
+                </a:solidFill>
+                <a:latin typeface="Arial" pitchFamily="34" charset="0"/>
+                <a:ea typeface="Arial" pitchFamily="34" charset="-122"/>
+                <a:cs typeface="Arial" pitchFamily="34" charset="-120"/>
+              </a:rPr>
+              <a:t>Examples and fixtures make supported behavior concrete.</a:t>
+            </a:r>
+            <a:endParaRPr lang="en-US" sz="1050" dirty="0"/>
+          </a:p>
+        </p:txBody>
+      </p:sp>
+      <p:sp>
+        <p:nvSpPr>
+          <p:cNvPr id="9" name="Text 6"/>
+          <p:cNvSpPr/>
+          <p:nvPr/>
+        </p:nvSpPr>
+        <p:spPr>
+          <a:xfrm>
+            <a:off x="8244233" y="4940201"/>
+            <a:ext cx="544068" cy="107900"/>
+          </a:xfrm>
+          <a:prstGeom prst="rect">
+            <a:avLst/>
+          </a:prstGeom>
+          <a:noFill/>
+          <a:ln/>
+        </p:spPr>
+        <p:txBody>
+          <a:bodyPr wrap="square" lIns="0" tIns="0" rIns="0" bIns="0" rtlCol="0" anchor="t"/>
+          <a:lstStyle/>
+          <a:p>
+            <a:pPr algn="r" indent="0" marL="0">
+              <a:lnSpc>
+                <a:spcPts val="850"/>
+              </a:lnSpc>
+              <a:buNone/>
+            </a:pPr>
+            <a:r>
+              <a:rPr lang="en-US" sz="850" dirty="0">
+                <a:solidFill>
+                  <a:srgbClr val="052243"/>
+                </a:solidFill>
+                <a:latin typeface="Arial" pitchFamily="34" charset="0"/>
+                <a:ea typeface="Arial" pitchFamily="34" charset="-122"/>
+                <a:cs typeface="Arial" pitchFamily="34" charset="-120"/>
+              </a:rPr>
+              <a:t>13 / 27</a:t>
             </a:r>
             <a:endParaRPr lang="en-US" sz="850" dirty="0"/>
           </a:p>
@@ -3771,7 +4250,7 @@
                 <a:ea typeface="Arial" pitchFamily="34" charset="-122"/>
                 <a:cs typeface="Arial" pitchFamily="34" charset="-120"/>
               </a:rPr>
-              <a:t>Resources and contribution steps</a:t>
+              <a:t>Contribute to Operator Framework</a:t>
             </a:r>
             <a:endParaRPr lang="en-US" sz="2800" dirty="0"/>
           </a:p>
@@ -3786,7 +4265,7 @@
         <p:spPr>
           <a:xfrm>
             <a:off x="355550" y="1104900"/>
-            <a:ext cx="2458045" cy="253752"/>
+            <a:ext cx="1830139" cy="253752"/>
           </a:xfrm>
           <a:prstGeom prst="rect">
             <a:avLst/>
@@ -3816,7 +4295,7 @@
         <p:spPr>
           <a:xfrm>
             <a:off x="469850" y="1168301"/>
-            <a:ext cx="2274034" cy="126950"/>
+            <a:ext cx="1633570" cy="126950"/>
           </a:xfrm>
           <a:prstGeom prst="rect">
             <a:avLst/>
@@ -3843,7 +4322,7 @@
                 <a:ea typeface="Arial" pitchFamily="34" charset="-122"/>
                 <a:cs typeface="Arial" pitchFamily="34" charset="-120"/>
               </a:rPr>
-              <a:t>RESOURCE PACKAGE TO PREPARE</a:t>
+              <a:t>PROJECT DEVELOPMENT</a:t>
             </a:r>
             <a:endParaRPr lang="en-US" sz="1000" dirty="0"/>
           </a:p>
@@ -3858,7 +4337,7 @@
         <p:spPr>
           <a:xfrm>
             <a:off x="355550" y="1524000"/>
-            <a:ext cx="3704793" cy="775097"/>
+            <a:ext cx="3704793" cy="516731"/>
           </a:xfrm>
           <a:prstGeom prst="rect">
             <a:avLst/>
@@ -3888,7 +4367,7 @@
                 <a:ea typeface="Arial" pitchFamily="34" charset="-122"/>
                 <a:cs typeface="Arial" pitchFamily="34" charset="-120"/>
               </a:rPr>
-              <a:t>Use documented contracts and reproducible cases to guide contributions.</a:t>
+              <a:t>Contribute to Operator Framework development.</a:t>
             </a:r>
             <a:endParaRPr lang="en-US" sz="1850" dirty="0"/>
           </a:p>
@@ -3902,8 +4381,8 @@
         </p:nvSpPr>
         <p:spPr>
           <a:xfrm>
-            <a:off x="355550" y="2438698"/>
-            <a:ext cx="3632150" cy="1350466"/>
+            <a:off x="355550" y="2180332"/>
+            <a:ext cx="3632150" cy="1579959"/>
           </a:xfrm>
           <a:prstGeom prst="rect">
             <a:avLst/>
@@ -3934,7 +4413,7 @@
                 <a:ea typeface="Arial" pitchFamily="34" charset="-122"/>
                 <a:cs typeface="Arial" pitchFamily="34" charset="-120"/>
               </a:rPr>
-              <a:t>Check content against a documented contract</a:t>
+              <a:t>Read the repository contribution guide</a:t>
             </a:r>
             <a:endParaRPr lang="en-US" sz="1600" dirty="0"/>
           </a:p>
@@ -3958,7 +4437,7 @@
                 <a:ea typeface="Arial" pitchFamily="34" charset="-122"/>
                 <a:cs typeface="Arial" pitchFamily="34" charset="-120"/>
               </a:rPr>
-              <a:t>Share a reproducible case or fixture</a:t>
+              <a:t>Discuss an issue and propose a change</a:t>
             </a:r>
             <a:endParaRPr lang="en-US" sz="1600" dirty="0"/>
           </a:p>
@@ -3982,7 +4461,7 @@
                 <a:ea typeface="Arial" pitchFamily="34" charset="-122"/>
                 <a:cs typeface="Arial" pitchFamily="34" charset="-120"/>
               </a:rPr>
-              <a:t>Select a maintainer-scoped contribution</a:t>
+              <a:t>Submit code, documentation or test fixtures</a:t>
             </a:r>
             <a:endParaRPr lang="en-US" sz="1600" dirty="0"/>
           </a:p>
@@ -3990,7 +4469,7 @@
       </p:sp>
       <p:pic>
         <p:nvPicPr>
-          <p:cNvPr id="7" name="Image 0" descr="/Users/jordan/Documents/devel/breadcrumbs/2026-kubecon-wip/dry-run/theme/assets/s19.png">    </p:cNvPr>
+          <p:cNvPr id="7" name="Image 0" descr="/Users/jordan/Documents/devel/breadcrumbs/2026-kubecon-wip/current-visuals/contributing-qr.png">    </p:cNvPr>
           <p:cNvPicPr>
             <a:picLocks noChangeAspect="1"/>
           </p:cNvPicPr>
@@ -4004,8 +4483,8 @@
         </p:blipFill>
         <p:spPr>
           <a:xfrm>
-            <a:off x="4292501" y="1460450"/>
-            <a:ext cx="4495800" cy="2997101"/>
+            <a:off x="5524500" y="1943100"/>
+            <a:ext cx="2031950" cy="2031950"/>
           </a:xfrm>
           <a:prstGeom prst="rect">
             <a:avLst/>
@@ -4020,8 +4499,8 @@
         </p:nvSpPr>
         <p:spPr>
           <a:xfrm>
-            <a:off x="1968401" y="4711601"/>
-            <a:ext cx="6217920" cy="304800"/>
+            <a:off x="8244233" y="4940201"/>
+            <a:ext cx="544068" cy="107900"/>
           </a:xfrm>
           <a:prstGeom prst="rect">
             <a:avLst/>
@@ -4033,14 +4512,14 @@
           <a:bodyPr wrap="square" lIns="0" tIns="0" rIns="0" bIns="0" rtlCol="0" anchor="t"/>
           <a:lstStyle/>
           <a:p>
-            <a:pPr algn="l" indent="0" marL="0">
-              <a:lnSpc>
-                <a:spcPts val="1176"/>
-              </a:lnSpc>
-              <a:buNone/>
-            </a:pPr>
-            <a:r>
-              <a:rPr lang="en-US" sz="1050" i="1" dirty="0">
+            <a:pPr algn="r" indent="0" marL="0">
+              <a:lnSpc>
+                <a:spcPts val="850"/>
+              </a:lnSpc>
+              <a:buNone/>
+            </a:pPr>
+            <a:r>
+              <a:rPr lang="en-US" sz="850" dirty="0">
                 <a:solidFill>
                   <a:srgbClr val="052243"/>
                 </a:solidFill>
@@ -4048,22 +4527,24 @@
                 <a:ea typeface="Arial" pitchFamily="34" charset="-122"/>
                 <a:cs typeface="Arial" pitchFamily="34" charset="-120"/>
               </a:rPr>
-              <a:t>Companion examples and task links are being prepared.</a:t>
-            </a:r>
-            <a:endParaRPr lang="en-US" sz="1050" dirty="0"/>
-          </a:p>
-        </p:txBody>
-      </p:sp>
-      <p:sp>
-        <p:nvSpPr>
-          <p:cNvPr id="9" name="Text 6"/>
+              <a:t>14 / 27</a:t>
+            </a:r>
+            <a:endParaRPr lang="en-US" sz="850" dirty="0"/>
+          </a:p>
+        </p:txBody>
+      </p:sp>
+      <p:sp>
+        <p:nvSpPr>
+          <p:cNvPr id="9" name="Text 6">
+            <a:hlinkClick r:id="rId2" tooltip=""/>
+          </p:cNvPr>
           <p:cNvSpPr/>
           <p:nvPr/>
         </p:nvSpPr>
         <p:spPr>
           <a:xfrm>
-            <a:off x="8244233" y="4940201"/>
-            <a:ext cx="544068" cy="107900"/>
+            <a:off x="1968500" y="4711700"/>
+            <a:ext cx="6096000" cy="304800"/>
           </a:xfrm>
           <a:prstGeom prst="rect">
             <a:avLst/>
@@ -4072,27 +4553,31 @@
           <a:ln/>
         </p:spPr>
         <p:txBody>
-          <a:bodyPr wrap="square" lIns="0" tIns="0" rIns="0" bIns="0" rtlCol="0" anchor="t"/>
+          <a:bodyPr wrap="square" lIns="0" tIns="0" rIns="0" bIns="0" rtlCol="0" anchor="ctr"/>
           <a:lstStyle/>
           <a:p>
-            <a:pPr algn="r" indent="0" marL="0">
-              <a:lnSpc>
-                <a:spcPts val="850"/>
-              </a:lnSpc>
-              <a:buNone/>
-            </a:pPr>
-            <a:r>
-              <a:rPr lang="en-US" sz="850" dirty="0">
+            <a:pPr indent="0" marL="0">
+              <a:buNone/>
+            </a:pPr>
+            <a:r>
+              <a:rPr lang="en-US" sz="1050" i="1" u="sng" dirty="0">
                 <a:solidFill>
                   <a:srgbClr val="052243"/>
                 </a:solidFill>
                 <a:latin typeface="Arial" pitchFamily="34" charset="0"/>
                 <a:ea typeface="Arial" pitchFamily="34" charset="-122"/>
                 <a:cs typeface="Arial" pitchFamily="34" charset="-120"/>
+                <a:hlinkClick r:id="rId2" invalidUrl="" action="" tgtFrame="" tooltip="" history="1" highlightClick="0" endSnd="0">
+                  <a:extLst>
+                    <a:ext uri="{A12FA001-AC4F-418D-AE19-62706E023703}">
+                      <ahyp:hlinkClr xmlns:ahyp="http://schemas.microsoft.com/office/drawing/2018/hyperlinkcolor" val="tx"/>
+                    </a:ext>
+                  </a:extLst>
+                </a:hlinkClick>
               </a:rPr>
-              <a:t>24 / 25</a:t>
-            </a:r>
-            <a:endParaRPr lang="en-US" sz="850" dirty="0"/>
+              <a:t>operator-controller: CONTRIBUTING.md</a:t>
+            </a:r>
+            <a:endParaRPr lang="en-US" sz="1050" dirty="0"/>
           </a:p>
         </p:txBody>
       </p:sp>
@@ -4136,6 +4621,512 @@
         </p:nvSpPr>
         <p:spPr>
           <a:xfrm>
+            <a:off x="944782" y="1739801"/>
+            <a:ext cx="7254139" cy="992981"/>
+          </a:xfrm>
+          <a:prstGeom prst="rect">
+            <a:avLst/>
+          </a:prstGeom>
+          <a:noFill/>
+          <a:ln/>
+        </p:spPr>
+        <p:txBody>
+          <a:bodyPr wrap="square" lIns="0" tIns="0" rIns="0" bIns="0" rtlCol="0" anchor="t"/>
+          <a:lstStyle/>
+          <a:p>
+            <a:pPr algn="ctr" indent="0" marL="0">
+              <a:lnSpc>
+                <a:spcPts val="3910"/>
+              </a:lnSpc>
+              <a:buNone/>
+            </a:pPr>
+            <a:r>
+              <a:rPr lang="en-US" sz="3400" b="1" dirty="0">
+                <a:solidFill>
+                  <a:srgbClr val="00144C"/>
+                </a:solidFill>
+                <a:latin typeface="Arial" pitchFamily="34" charset="0"/>
+                <a:ea typeface="Arial" pitchFamily="34" charset="-122"/>
+                <a:cs typeface="Arial" pitchFamily="34" charset="-120"/>
+              </a:rPr>
+              <a:t>Operator Framework: Java Operator SDK</a:t>
+            </a:r>
+            <a:endParaRPr lang="en-US" sz="3400" dirty="0"/>
+          </a:p>
+        </p:txBody>
+      </p:sp>
+      <p:sp>
+        <p:nvSpPr>
+          <p:cNvPr id="3" name="Text 1"/>
+          <p:cNvSpPr/>
+          <p:nvPr/>
+        </p:nvSpPr>
+        <p:spPr>
+          <a:xfrm>
+            <a:off x="8244233" y="4940201"/>
+            <a:ext cx="544068" cy="114300"/>
+          </a:xfrm>
+          <a:prstGeom prst="rect">
+            <a:avLst/>
+          </a:prstGeom>
+          <a:noFill/>
+          <a:ln/>
+        </p:spPr>
+        <p:txBody>
+          <a:bodyPr wrap="square" lIns="0" tIns="0" rIns="0" bIns="0" rtlCol="0" anchor="t"/>
+          <a:lstStyle/>
+          <a:p>
+            <a:pPr algn="r" indent="0" marL="0">
+              <a:buNone/>
+            </a:pPr>
+            <a:r>
+              <a:rPr lang="en-US" sz="850" dirty="0">
+                <a:solidFill>
+                  <a:srgbClr val="052243"/>
+                </a:solidFill>
+                <a:latin typeface="Arial" pitchFamily="34" charset="0"/>
+                <a:ea typeface="Arial" pitchFamily="34" charset="-122"/>
+                <a:cs typeface="Arial" pitchFamily="34" charset="-120"/>
+              </a:rPr>
+              <a:t>15 / 27</a:t>
+            </a:r>
+            <a:endParaRPr lang="en-US" sz="850" dirty="0"/>
+          </a:p>
+        </p:txBody>
+      </p:sp>
+    </p:spTree>
+  </p:cSld>
+  <p:clrMapOvr>
+    <a:masterClrMapping/>
+  </p:clrMapOvr>
+</p:sld>
+</file>
+
+<file path=ppt/slides/slide16.xml><?xml version="1.0" encoding="utf-8"?>
+<p:sld xmlns:a="http://schemas.openxmlformats.org/drawingml/2006/main" xmlns:r="http://schemas.openxmlformats.org/officeDocument/2006/relationships" xmlns:p="http://schemas.openxmlformats.org/presentationml/2006/main">
+  <p:cSld name="Slide 16">
+    <p:bg>
+      <p:bgPr>
+        <a:solidFill>
+          <a:srgbClr val="FFFFFF"/>
+        </a:solidFill>
+      </p:bgPr>
+    </p:bg>
+    <p:spTree>
+      <p:nvGrpSpPr>
+        <p:cNvPr id="1" name=""/>
+        <p:cNvGrpSpPr/>
+        <p:nvPr/>
+      </p:nvGrpSpPr>
+      <p:grpSpPr>
+        <a:xfrm>
+          <a:off x="0" y="0"/>
+          <a:ext cx="0" cy="0"/>
+          <a:chOff x="0" y="0"/>
+          <a:chExt cx="0" cy="0"/>
+        </a:xfrm>
+      </p:grpSpPr>
+      <p:sp>
+        <p:nvSpPr>
+          <p:cNvPr id="2" name="Text 0"/>
+          <p:cNvSpPr/>
+          <p:nvPr/>
+        </p:nvSpPr>
+        <p:spPr>
+          <a:xfrm>
+            <a:off x="311646" y="444996"/>
+            <a:ext cx="8601405" cy="507950"/>
+          </a:xfrm>
+          <a:prstGeom prst="rect">
+            <a:avLst/>
+          </a:prstGeom>
+          <a:noFill/>
+          <a:ln/>
+        </p:spPr>
+        <p:txBody>
+          <a:bodyPr wrap="square" lIns="0" tIns="0" rIns="0" bIns="0" rtlCol="0" anchor="t"/>
+          <a:lstStyle/>
+          <a:p>
+            <a:pPr algn="l" indent="0" marL="0">
+              <a:lnSpc>
+                <a:spcPts val="3192"/>
+              </a:lnSpc>
+              <a:buNone/>
+            </a:pPr>
+            <a:r>
+              <a:rPr lang="en-US" sz="2800" b="1" dirty="0">
+                <a:solidFill>
+                  <a:srgbClr val="00144C"/>
+                </a:solidFill>
+                <a:latin typeface="Arial" pitchFamily="34" charset="0"/>
+                <a:ea typeface="Arial" pitchFamily="34" charset="-122"/>
+                <a:cs typeface="Arial" pitchFamily="34" charset="-120"/>
+              </a:rPr>
+              <a:t>Resources and contribution steps</a:t>
+            </a:r>
+            <a:endParaRPr lang="en-US" sz="2800" dirty="0"/>
+          </a:p>
+        </p:txBody>
+      </p:sp>
+      <p:sp>
+        <p:nvSpPr>
+          <p:cNvPr id="3" name="Text 1"/>
+          <p:cNvSpPr/>
+          <p:nvPr/>
+        </p:nvSpPr>
+        <p:spPr>
+          <a:xfrm>
+            <a:off x="355550" y="1104900"/>
+            <a:ext cx="2458045" cy="253752"/>
+          </a:xfrm>
+          <a:prstGeom prst="rect">
+            <a:avLst/>
+          </a:prstGeom>
+          <a:solidFill>
+            <a:srgbClr val="E3F6FF"/>
+          </a:solidFill>
+          <a:ln/>
+        </p:spPr>
+        <p:txBody>
+          <a:bodyPr wrap="square" rtlCol="0" anchor="ctr"/>
+          <a:lstStyle/>
+          <a:p>
+            <a:pPr indent="0" marL="0">
+              <a:buNone/>
+            </a:pPr>
+            <a:endParaRPr lang="en-US" dirty="0"/>
+          </a:p>
+        </p:txBody>
+      </p:sp>
+      <p:sp>
+        <p:nvSpPr>
+          <p:cNvPr id="4" name="Text 2"/>
+          <p:cNvSpPr/>
+          <p:nvPr/>
+        </p:nvSpPr>
+        <p:spPr>
+          <a:xfrm>
+            <a:off x="469850" y="1168301"/>
+            <a:ext cx="2274034" cy="126950"/>
+          </a:xfrm>
+          <a:prstGeom prst="rect">
+            <a:avLst/>
+          </a:prstGeom>
+          <a:noFill/>
+          <a:ln/>
+        </p:spPr>
+        <p:txBody>
+          <a:bodyPr wrap="square" lIns="0" tIns="0" rIns="0" bIns="0" rtlCol="0" anchor="t"/>
+          <a:lstStyle/>
+          <a:p>
+            <a:pPr algn="l" indent="0" marL="0">
+              <a:lnSpc>
+                <a:spcPts val="1000"/>
+              </a:lnSpc>
+              <a:buNone/>
+            </a:pPr>
+            <a:r>
+              <a:rPr lang="en-US" sz="1000" b="1" dirty="0">
+                <a:solidFill>
+                  <a:srgbClr val="00144C"/>
+                </a:solidFill>
+                <a:latin typeface="Arial" pitchFamily="34" charset="0"/>
+                <a:ea typeface="Arial" pitchFamily="34" charset="-122"/>
+                <a:cs typeface="Arial" pitchFamily="34" charset="-120"/>
+              </a:rPr>
+              <a:t>RESOURCE PACKAGE TO PREPARE</a:t>
+            </a:r>
+            <a:endParaRPr lang="en-US" sz="1000" dirty="0"/>
+          </a:p>
+        </p:txBody>
+      </p:sp>
+      <p:sp>
+        <p:nvSpPr>
+          <p:cNvPr id="5" name="Text 3"/>
+          <p:cNvSpPr/>
+          <p:nvPr/>
+        </p:nvSpPr>
+        <p:spPr>
+          <a:xfrm>
+            <a:off x="355550" y="1524000"/>
+            <a:ext cx="3704793" cy="775097"/>
+          </a:xfrm>
+          <a:prstGeom prst="rect">
+            <a:avLst/>
+          </a:prstGeom>
+          <a:noFill/>
+          <a:ln/>
+        </p:spPr>
+        <p:txBody>
+          <a:bodyPr wrap="square" lIns="0" tIns="0" rIns="0" bIns="0" rtlCol="0" anchor="t"/>
+          <a:lstStyle/>
+          <a:p>
+            <a:pPr algn="l" indent="0" marL="0">
+              <a:lnSpc>
+                <a:spcPts val="2035"/>
+              </a:lnSpc>
+              <a:spcAft>
+                <a:spcPts val="1100"/>
+              </a:spcAft>
+              <a:buNone/>
+            </a:pPr>
+            <a:r>
+              <a:rPr lang="en-US" sz="1850" b="1" dirty="0">
+                <a:solidFill>
+                  <a:srgbClr val="052243"/>
+                </a:solidFill>
+                <a:latin typeface="Arial" pitchFamily="34" charset="0"/>
+                <a:ea typeface="Arial" pitchFamily="34" charset="-122"/>
+                <a:cs typeface="Arial" pitchFamily="34" charset="-120"/>
+              </a:rPr>
+              <a:t>Use documented contracts and reproducible cases to guide contributions.</a:t>
+            </a:r>
+            <a:endParaRPr lang="en-US" sz="1850" dirty="0"/>
+          </a:p>
+        </p:txBody>
+      </p:sp>
+      <p:sp>
+        <p:nvSpPr>
+          <p:cNvPr id="6" name="Text 4"/>
+          <p:cNvSpPr/>
+          <p:nvPr/>
+        </p:nvSpPr>
+        <p:spPr>
+          <a:xfrm>
+            <a:off x="355550" y="2438698"/>
+            <a:ext cx="3632150" cy="1350466"/>
+          </a:xfrm>
+          <a:prstGeom prst="rect">
+            <a:avLst/>
+          </a:prstGeom>
+          <a:noFill/>
+          <a:ln/>
+        </p:spPr>
+        <p:txBody>
+          <a:bodyPr wrap="square" lIns="107950" tIns="0" rIns="0" bIns="0" rtlCol="0" anchor="t"/>
+          <a:lstStyle/>
+          <a:p>
+            <a:pPr algn="l" marL="107950" indent="-107950">
+              <a:lnSpc>
+                <a:spcPts val="1808"/>
+              </a:lnSpc>
+              <a:spcAft>
+                <a:spcPts val="800"/>
+              </a:spcAft>
+              <a:buSzPct val="100000"/>
+              <a:buChar char="•"/>
+            </a:pPr>
+            <a:r>
+              <a:rPr lang="en-US" sz="1600" dirty="0">
+                <a:solidFill>
+                  <a:srgbClr val="052243"/>
+                </a:solidFill>
+                <a:latin typeface="Arial" pitchFamily="34" charset="0"/>
+                <a:ea typeface="Arial" pitchFamily="34" charset="-122"/>
+                <a:cs typeface="Arial" pitchFamily="34" charset="-120"/>
+              </a:rPr>
+              <a:t>Check content against a documented contract</a:t>
+            </a:r>
+            <a:endParaRPr lang="en-US" sz="1600" dirty="0"/>
+          </a:p>
+          <a:p>
+            <a:pPr algn="l" marL="107950" indent="-107950">
+              <a:lnSpc>
+                <a:spcPts val="1808"/>
+              </a:lnSpc>
+              <a:spcAft>
+                <a:spcPts val="800"/>
+              </a:spcAft>
+              <a:buSzPct val="100000"/>
+              <a:buChar char="•"/>
+            </a:pPr>
+            <a:r>
+              <a:rPr lang="en-US" sz="1600" dirty="0">
+                <a:solidFill>
+                  <a:srgbClr val="052243"/>
+                </a:solidFill>
+                <a:latin typeface="Arial" pitchFamily="34" charset="0"/>
+                <a:ea typeface="Arial" pitchFamily="34" charset="-122"/>
+                <a:cs typeface="Arial" pitchFamily="34" charset="-120"/>
+              </a:rPr>
+              <a:t>Share a reproducible case or fixture</a:t>
+            </a:r>
+            <a:endParaRPr lang="en-US" sz="1600" dirty="0"/>
+          </a:p>
+          <a:p>
+            <a:pPr algn="l" marL="107950" indent="-107950">
+              <a:lnSpc>
+                <a:spcPts val="1808"/>
+              </a:lnSpc>
+              <a:spcAft>
+                <a:spcPts val="800"/>
+              </a:spcAft>
+              <a:buSzPct val="100000"/>
+              <a:buChar char="•"/>
+            </a:pPr>
+            <a:r>
+              <a:rPr lang="en-US" sz="1600" dirty="0">
+                <a:solidFill>
+                  <a:srgbClr val="052243"/>
+                </a:solidFill>
+                <a:latin typeface="Arial" pitchFamily="34" charset="0"/>
+                <a:ea typeface="Arial" pitchFamily="34" charset="-122"/>
+                <a:cs typeface="Arial" pitchFamily="34" charset="-120"/>
+              </a:rPr>
+              <a:t>Select a maintainer-scoped contribution</a:t>
+            </a:r>
+            <a:endParaRPr lang="en-US" sz="1600" dirty="0"/>
+          </a:p>
+        </p:txBody>
+      </p:sp>
+      <p:pic>
+        <p:nvPicPr>
+          <p:cNvPr id="7" name="Image 0" descr="/Users/jordan/Documents/devel/breadcrumbs/2026-kubecon-wip/dry-run/theme/assets/s19.png">    </p:cNvPr>
+          <p:cNvPicPr>
+            <a:picLocks noChangeAspect="1"/>
+          </p:cNvPicPr>
+          <p:nvPr/>
+        </p:nvPicPr>
+        <p:blipFill>
+          <a:blip r:embed="rId1"/>
+          <a:stretch>
+            <a:fillRect/>
+          </a:stretch>
+        </p:blipFill>
+        <p:spPr>
+          <a:xfrm>
+            <a:off x="4292501" y="1460450"/>
+            <a:ext cx="4495800" cy="2997101"/>
+          </a:xfrm>
+          <a:prstGeom prst="rect">
+            <a:avLst/>
+          </a:prstGeom>
+        </p:spPr>
+      </p:pic>
+      <p:sp>
+        <p:nvSpPr>
+          <p:cNvPr id="8" name="Text 5"/>
+          <p:cNvSpPr/>
+          <p:nvPr/>
+        </p:nvSpPr>
+        <p:spPr>
+          <a:xfrm>
+            <a:off x="1968401" y="4711601"/>
+            <a:ext cx="6217920" cy="304800"/>
+          </a:xfrm>
+          <a:prstGeom prst="rect">
+            <a:avLst/>
+          </a:prstGeom>
+          <a:noFill/>
+          <a:ln/>
+        </p:spPr>
+        <p:txBody>
+          <a:bodyPr wrap="square" lIns="0" tIns="0" rIns="0" bIns="0" rtlCol="0" anchor="t"/>
+          <a:lstStyle/>
+          <a:p>
+            <a:pPr algn="l" indent="0" marL="0">
+              <a:lnSpc>
+                <a:spcPts val="1176"/>
+              </a:lnSpc>
+              <a:buNone/>
+            </a:pPr>
+            <a:r>
+              <a:rPr lang="en-US" sz="1050" i="1" dirty="0">
+                <a:solidFill>
+                  <a:srgbClr val="052243"/>
+                </a:solidFill>
+                <a:latin typeface="Arial" pitchFamily="34" charset="0"/>
+                <a:ea typeface="Arial" pitchFamily="34" charset="-122"/>
+                <a:cs typeface="Arial" pitchFamily="34" charset="-120"/>
+              </a:rPr>
+              <a:t>Companion examples and task links are being prepared.</a:t>
+            </a:r>
+            <a:endParaRPr lang="en-US" sz="1050" dirty="0"/>
+          </a:p>
+        </p:txBody>
+      </p:sp>
+      <p:sp>
+        <p:nvSpPr>
+          <p:cNvPr id="9" name="Text 6"/>
+          <p:cNvSpPr/>
+          <p:nvPr/>
+        </p:nvSpPr>
+        <p:spPr>
+          <a:xfrm>
+            <a:off x="8244233" y="4940201"/>
+            <a:ext cx="544068" cy="107900"/>
+          </a:xfrm>
+          <a:prstGeom prst="rect">
+            <a:avLst/>
+          </a:prstGeom>
+          <a:noFill/>
+          <a:ln/>
+        </p:spPr>
+        <p:txBody>
+          <a:bodyPr wrap="square" lIns="0" tIns="0" rIns="0" bIns="0" rtlCol="0" anchor="t"/>
+          <a:lstStyle/>
+          <a:p>
+            <a:pPr algn="r" indent="0" marL="0">
+              <a:lnSpc>
+                <a:spcPts val="850"/>
+              </a:lnSpc>
+              <a:buNone/>
+            </a:pPr>
+            <a:r>
+              <a:rPr lang="en-US" sz="850" dirty="0">
+                <a:solidFill>
+                  <a:srgbClr val="052243"/>
+                </a:solidFill>
+                <a:latin typeface="Arial" pitchFamily="34" charset="0"/>
+                <a:ea typeface="Arial" pitchFamily="34" charset="-122"/>
+                <a:cs typeface="Arial" pitchFamily="34" charset="-120"/>
+              </a:rPr>
+              <a:t>26 / 27</a:t>
+            </a:r>
+            <a:endParaRPr lang="en-US" sz="850" dirty="0"/>
+          </a:p>
+        </p:txBody>
+      </p:sp>
+    </p:spTree>
+  </p:cSld>
+  <p:clrMapOvr>
+    <a:masterClrMapping/>
+  </p:clrMapOvr>
+</p:sld>
+</file>
+
+<file path=ppt/slides/slide17.xml><?xml version="1.0" encoding="utf-8"?>
+<p:sld xmlns:a="http://schemas.openxmlformats.org/drawingml/2006/main" xmlns:r="http://schemas.openxmlformats.org/officeDocument/2006/relationships" xmlns:p="http://schemas.openxmlformats.org/presentationml/2006/main">
+  <p:cSld name="Slide 17">
+    <p:bg>
+      <p:bgPr>
+        <a:solidFill>
+          <a:srgbClr val="FFFFFF"/>
+        </a:solidFill>
+      </p:bgPr>
+    </p:bg>
+    <p:spTree>
+      <p:nvGrpSpPr>
+        <p:cNvPr id="1" name=""/>
+        <p:cNvGrpSpPr/>
+        <p:nvPr/>
+      </p:nvGrpSpPr>
+      <p:grpSpPr>
+        <a:xfrm>
+          <a:off x="0" y="0"/>
+          <a:ext cx="0" cy="0"/>
+          <a:chOff x="0" y="0"/>
+          <a:chExt cx="0" cy="0"/>
+        </a:xfrm>
+      </p:grpSpPr>
+      <p:sp>
+        <p:nvSpPr>
+          <p:cNvPr id="2" name="Text 0"/>
+          <p:cNvSpPr/>
+          <p:nvPr/>
+        </p:nvSpPr>
+        <p:spPr>
+          <a:xfrm>
             <a:off x="311646" y="444996"/>
             <a:ext cx="8601405" cy="507950"/>
           </a:xfrm>
@@ -4411,7 +5402,7 @@
                 <a:ea typeface="Arial" pitchFamily="34" charset="-122"/>
                 <a:cs typeface="Arial" pitchFamily="34" charset="-120"/>
               </a:rPr>
-              <a:t>25 / 25</a:t>
+              <a:t>27 / 27</a:t>
             </a:r>
             <a:endParaRPr lang="en-US" sz="850" dirty="0"/>
           </a:p>
@@ -4740,7 +5731,7 @@
                 <a:ea typeface="Arial" pitchFamily="34" charset="-122"/>
                 <a:cs typeface="Arial" pitchFamily="34" charset="-120"/>
               </a:rPr>
-              <a:t>2 / 25</a:t>
+              <a:t>2 / 27</a:t>
             </a:r>
             <a:endParaRPr lang="en-US" sz="850" dirty="0"/>
           </a:p>
@@ -5133,7 +6124,7 @@
                 <a:ea typeface="Arial" pitchFamily="34" charset="-122"/>
                 <a:cs typeface="Arial" pitchFamily="34" charset="-120"/>
               </a:rPr>
-              <a:t>3 / 25</a:t>
+              <a:t>3 / 27</a:t>
             </a:r>
             <a:endParaRPr lang="en-US" sz="850" dirty="0"/>
           </a:p>
@@ -5526,7 +6517,7 @@
                 <a:ea typeface="Arial" pitchFamily="34" charset="-122"/>
                 <a:cs typeface="Arial" pitchFamily="34" charset="-120"/>
               </a:rPr>
-              <a:t>4 / 25</a:t>
+              <a:t>4 / 27</a:t>
             </a:r>
             <a:endParaRPr lang="en-US" sz="850" dirty="0"/>
           </a:p>
@@ -5600,7 +6591,7 @@
                 <a:ea typeface="Arial" pitchFamily="34" charset="-122"/>
                 <a:cs typeface="Arial" pitchFamily="34" charset="-120"/>
               </a:rPr>
-              <a:t>Install a bundle directly</a:t>
+              <a:t>Streamlined Installation</a:t>
             </a:r>
             <a:endParaRPr lang="en-US" sz="2800" dirty="0"/>
           </a:p>
@@ -5614,38 +6605,8 @@
         </p:nvSpPr>
         <p:spPr>
           <a:xfrm>
-            <a:off x="355550" y="1104900"/>
-            <a:ext cx="4061371" cy="253752"/>
-          </a:xfrm>
-          <a:prstGeom prst="rect">
-            <a:avLst/>
-          </a:prstGeom>
-          <a:solidFill>
-            <a:srgbClr val="E3F6FF"/>
-          </a:solidFill>
-          <a:ln/>
-        </p:spPr>
-        <p:txBody>
-          <a:bodyPr wrap="square" rtlCol="0" anchor="ctr"/>
-          <a:lstStyle/>
-          <a:p>
-            <a:pPr indent="0" marL="0">
-              <a:buNone/>
-            </a:pPr>
-            <a:endParaRPr lang="en-US" dirty="0"/>
-          </a:p>
-        </p:txBody>
-      </p:sp>
-      <p:sp>
-        <p:nvSpPr>
-          <p:cNvPr id="4" name="Text 2"/>
-          <p:cNvSpPr/>
-          <p:nvPr/>
-        </p:nvSpPr>
-        <p:spPr>
-          <a:xfrm>
-            <a:off x="469850" y="1168301"/>
-            <a:ext cx="3909426" cy="126950"/>
+            <a:off x="355550" y="1524000"/>
+            <a:ext cx="3704793" cy="258366"/>
           </a:xfrm>
           <a:prstGeom prst="rect">
             <a:avLst/>
@@ -5659,35 +6620,38 @@
           <a:p>
             <a:pPr algn="l" indent="0" marL="0">
               <a:lnSpc>
-                <a:spcPts val="1000"/>
-              </a:lnSpc>
-              <a:buNone/>
-            </a:pPr>
-            <a:r>
-              <a:rPr lang="en-US" sz="1000" b="1" dirty="0">
-                <a:solidFill>
-                  <a:srgbClr val="00144C"/>
+                <a:spcPts val="2035"/>
+              </a:lnSpc>
+              <a:spcAft>
+                <a:spcPts val="1100"/>
+              </a:spcAft>
+              <a:buNone/>
+            </a:pPr>
+            <a:r>
+              <a:rPr lang="en-US" sz="1850" b="1" dirty="0">
+                <a:solidFill>
+                  <a:srgbClr val="052243"/>
                 </a:solidFill>
                 <a:latin typeface="Arial" pitchFamily="34" charset="0"/>
                 <a:ea typeface="Arial" pitchFamily="34" charset="-122"/>
                 <a:cs typeface="Arial" pitchFamily="34" charset="-120"/>
               </a:rPr>
-              <a:t>IN ACTIVE DEVELOPMENT / CONTROLLED BY FEATURE-GATE</a:t>
-            </a:r>
-            <a:endParaRPr lang="en-US" sz="1000" dirty="0"/>
-          </a:p>
-        </p:txBody>
-      </p:sp>
-      <p:sp>
-        <p:nvSpPr>
-          <p:cNvPr id="5" name="Text 3"/>
+              <a:t>Standard channel since v1.11.0</a:t>
+            </a:r>
+            <a:endParaRPr lang="en-US" sz="1850" dirty="0"/>
+          </a:p>
+        </p:txBody>
+      </p:sp>
+      <p:sp>
+        <p:nvSpPr>
+          <p:cNvPr id="4" name="Text 2"/>
           <p:cNvSpPr/>
           <p:nvPr/>
         </p:nvSpPr>
         <p:spPr>
           <a:xfrm>
-            <a:off x="355550" y="1524000"/>
-            <a:ext cx="3704793" cy="516731"/>
+            <a:off x="355550" y="1921966"/>
+            <a:ext cx="3632150" cy="1579959"/>
           </a:xfrm>
           <a:prstGeom prst="rect">
             <a:avLst/>
@@ -5696,20 +6660,21 @@
           <a:ln/>
         </p:spPr>
         <p:txBody>
-          <a:bodyPr wrap="square" lIns="0" tIns="0" rIns="0" bIns="0" rtlCol="0" anchor="t"/>
+          <a:bodyPr wrap="square" lIns="107950" tIns="0" rIns="0" bIns="0" rtlCol="0" anchor="t"/>
           <a:lstStyle/>
           <a:p>
-            <a:pPr algn="l" indent="0" marL="0">
-              <a:lnSpc>
-                <a:spcPts val="2035"/>
-              </a:lnSpc>
-              <a:spcAft>
-                <a:spcPts val="1100"/>
-              </a:spcAft>
-              <a:buNone/>
-            </a:pPr>
-            <a:r>
-              <a:rPr lang="en-US" sz="1850" b="1" dirty="0">
+            <a:pPr algn="l" marL="107950" indent="-107950">
+              <a:lnSpc>
+                <a:spcPts val="1808"/>
+              </a:lnSpc>
+              <a:spcAft>
+                <a:spcPts val="800"/>
+              </a:spcAft>
+              <a:buSzPct val="100000"/>
+              <a:buChar char="•"/>
+            </a:pPr>
+            <a:r>
+              <a:rPr lang="en-US" sz="1600" dirty="0">
                 <a:solidFill>
                   <a:srgbClr val="052243"/>
                 </a:solidFill>
@@ -5717,32 +6682,10 @@
                 <a:ea typeface="Arial" pitchFamily="34" charset="-122"/>
                 <a:cs typeface="Arial" pitchFamily="34" charset="-120"/>
               </a:rPr>
-              <a:t>Select a registry+v1 bundle by its OCI image reference.</a:t>
-            </a:r>
-            <a:endParaRPr lang="en-US" sz="1850" dirty="0"/>
-          </a:p>
-        </p:txBody>
-      </p:sp>
-      <p:sp>
-        <p:nvSpPr>
-          <p:cNvPr id="6" name="Text 4"/>
-          <p:cNvSpPr/>
-          <p:nvPr/>
-        </p:nvSpPr>
-        <p:spPr>
-          <a:xfrm>
-            <a:off x="355550" y="2180332"/>
-            <a:ext cx="3632150" cy="891480"/>
-          </a:xfrm>
-          <a:prstGeom prst="rect">
-            <a:avLst/>
-          </a:prstGeom>
-          <a:noFill/>
-          <a:ln/>
-        </p:spPr>
-        <p:txBody>
-          <a:bodyPr wrap="square" lIns="107950" tIns="0" rIns="0" bIns="0" rtlCol="0" anchor="t"/>
-          <a:lstStyle/>
+              <a:t>spec.serviceAccount is optional and ignored.</a:t>
+            </a:r>
+            <a:endParaRPr lang="en-US" sz="1600" dirty="0"/>
+          </a:p>
           <a:p>
             <a:pPr algn="l" marL="107950" indent="-107950">
               <a:lnSpc>
@@ -5763,7 +6706,7 @@
                 <a:ea typeface="Arial" pitchFamily="34" charset="-122"/>
                 <a:cs typeface="Arial" pitchFamily="34" charset="-120"/>
               </a:rPr>
-              <a:t>Use sourceType: OCIImage</a:t>
+              <a:t>The controller uses its own service account.</a:t>
             </a:r>
             <a:endParaRPr lang="en-US" sz="1600" dirty="0"/>
           </a:p>
@@ -5787,31 +6730,7 @@
                 <a:ea typeface="Arial" pitchFamily="34" charset="-122"/>
                 <a:cs typeface="Arial" pitchFamily="34" charset="-120"/>
               </a:rPr>
-              <a:t>Set source.ociImage.ref</a:t>
-            </a:r>
-            <a:endParaRPr lang="en-US" sz="1600" dirty="0"/>
-          </a:p>
-          <a:p>
-            <a:pPr algn="l" marL="107950" indent="-107950">
-              <a:lnSpc>
-                <a:spcPts val="1808"/>
-              </a:lnSpc>
-              <a:spcAft>
-                <a:spcPts val="800"/>
-              </a:spcAft>
-              <a:buSzPct val="100000"/>
-              <a:buChar char="•"/>
-            </a:pPr>
-            <a:r>
-              <a:rPr lang="en-US" sz="1600" dirty="0">
-                <a:solidFill>
-                  <a:srgbClr val="052243"/>
-                </a:solidFill>
-                <a:latin typeface="Arial" pitchFamily="34" charset="0"/>
-                <a:ea typeface="Arial" pitchFamily="34" charset="-122"/>
-                <a:cs typeface="Arial" pitchFamily="34" charset="-120"/>
-              </a:rPr>
-              <a:t>Bypass catalog resolution</a:t>
+              <a:t>Restrict ClusterExtension access with RBAC and admission policy.</a:t>
             </a:r>
             <a:endParaRPr lang="en-US" sz="1600" dirty="0"/>
           </a:p>
@@ -5819,7 +6738,7 @@
       </p:sp>
       <p:pic>
         <p:nvPicPr>
-          <p:cNvPr id="7" name="Image 0" descr="/Users/jordan/Documents/devel/breadcrumbs/2026-kubecon-wip/dry-run/theme/assets/s05.png">    </p:cNvPr>
+          <p:cNvPr id="5" name="Image 0" descr="/Users/jordan/Documents/devel/breadcrumbs/2026-kubecon-wip/current-visuals/streamlined-installation.png">    </p:cNvPr>
           <p:cNvPicPr>
             <a:picLocks noChangeAspect="1"/>
           </p:cNvPicPr>
@@ -5843,14 +6762,14 @@
       </p:pic>
       <p:sp>
         <p:nvSpPr>
-          <p:cNvPr id="8" name="Text 5"/>
+          <p:cNvPr id="6" name="Text 3"/>
           <p:cNvSpPr/>
           <p:nvPr/>
         </p:nvSpPr>
         <p:spPr>
           <a:xfrm>
-            <a:off x="1968401" y="4711601"/>
-            <a:ext cx="6217920" cy="304800"/>
+            <a:off x="8244233" y="4940201"/>
+            <a:ext cx="544068" cy="107900"/>
           </a:xfrm>
           <a:prstGeom prst="rect">
             <a:avLst/>
@@ -5862,14 +6781,14 @@
           <a:bodyPr wrap="square" lIns="0" tIns="0" rIns="0" bIns="0" rtlCol="0" anchor="t"/>
           <a:lstStyle/>
           <a:p>
-            <a:pPr algn="l" indent="0" marL="0">
-              <a:lnSpc>
-                <a:spcPts val="1176"/>
-              </a:lnSpc>
-              <a:buNone/>
-            </a:pPr>
-            <a:r>
-              <a:rPr lang="en-US" sz="1050" i="1" dirty="0">
+            <a:pPr algn="r" indent="0" marL="0">
+              <a:lnSpc>
+                <a:spcPts val="850"/>
+              </a:lnSpc>
+              <a:buNone/>
+            </a:pPr>
+            <a:r>
+              <a:rPr lang="en-US" sz="850" dirty="0">
                 <a:solidFill>
                   <a:srgbClr val="052243"/>
                 </a:solidFill>
@@ -5877,49 +6796,7 @@
                 <a:ea typeface="Arial" pitchFamily="34" charset="-122"/>
                 <a:cs typeface="Arial" pitchFamily="34" charset="-120"/>
               </a:rPr>
-              <a:t>Proposed in open PR #2907; controlled by BoxcutterRuntime.</a:t>
-            </a:r>
-            <a:endParaRPr lang="en-US" sz="1050" dirty="0"/>
-          </a:p>
-        </p:txBody>
-      </p:sp>
-      <p:sp>
-        <p:nvSpPr>
-          <p:cNvPr id="9" name="Text 6"/>
-          <p:cNvSpPr/>
-          <p:nvPr/>
-        </p:nvSpPr>
-        <p:spPr>
-          <a:xfrm>
-            <a:off x="8244233" y="4940201"/>
-            <a:ext cx="544068" cy="107900"/>
-          </a:xfrm>
-          <a:prstGeom prst="rect">
-            <a:avLst/>
-          </a:prstGeom>
-          <a:noFill/>
-          <a:ln/>
-        </p:spPr>
-        <p:txBody>
-          <a:bodyPr wrap="square" lIns="0" tIns="0" rIns="0" bIns="0" rtlCol="0" anchor="t"/>
-          <a:lstStyle/>
-          <a:p>
-            <a:pPr algn="r" indent="0" marL="0">
-              <a:lnSpc>
-                <a:spcPts val="850"/>
-              </a:lnSpc>
-              <a:buNone/>
-            </a:pPr>
-            <a:r>
-              <a:rPr lang="en-US" sz="850" dirty="0">
-                <a:solidFill>
-                  <a:srgbClr val="052243"/>
-                </a:solidFill>
-                <a:latin typeface="Arial" pitchFamily="34" charset="0"/>
-                <a:ea typeface="Arial" pitchFamily="34" charset="-122"/>
-                <a:cs typeface="Arial" pitchFamily="34" charset="-120"/>
-              </a:rPr>
-              <a:t>5 / 25</a:t>
+              <a:t>5 / 27</a:t>
             </a:r>
             <a:endParaRPr lang="en-US" sz="850" dirty="0"/>
           </a:p>
@@ -5993,7 +6870,7 @@
                 <a:ea typeface="Arial" pitchFamily="34" charset="-122"/>
                 <a:cs typeface="Arial" pitchFamily="34" charset="-120"/>
               </a:rPr>
-              <a:t>Inspect phased resource rollouts</a:t>
+              <a:t>Namespace Management</a:t>
             </a:r>
             <a:endParaRPr lang="en-US" sz="2800" dirty="0"/>
           </a:p>
@@ -6007,38 +6884,8 @@
         </p:nvSpPr>
         <p:spPr>
           <a:xfrm>
-            <a:off x="355550" y="1104900"/>
-            <a:ext cx="4061371" cy="253752"/>
-          </a:xfrm>
-          <a:prstGeom prst="rect">
-            <a:avLst/>
-          </a:prstGeom>
-          <a:solidFill>
-            <a:srgbClr val="E3F6FF"/>
-          </a:solidFill>
-          <a:ln/>
-        </p:spPr>
-        <p:txBody>
-          <a:bodyPr wrap="square" rtlCol="0" anchor="ctr"/>
-          <a:lstStyle/>
-          <a:p>
-            <a:pPr indent="0" marL="0">
-              <a:buNone/>
-            </a:pPr>
-            <a:endParaRPr lang="en-US" dirty="0"/>
-          </a:p>
-        </p:txBody>
-      </p:sp>
-      <p:sp>
-        <p:nvSpPr>
-          <p:cNvPr id="4" name="Text 2"/>
-          <p:cNvSpPr/>
-          <p:nvPr/>
-        </p:nvSpPr>
-        <p:spPr>
-          <a:xfrm>
-            <a:off x="469850" y="1168301"/>
-            <a:ext cx="3909426" cy="126950"/>
+            <a:off x="355550" y="1524000"/>
+            <a:ext cx="3704793" cy="454819"/>
           </a:xfrm>
           <a:prstGeom prst="rect">
             <a:avLst/>
@@ -6052,57 +6899,38 @@
           <a:p>
             <a:pPr algn="l" indent="0" marL="0">
               <a:lnSpc>
-                <a:spcPts val="1000"/>
-              </a:lnSpc>
-              <a:buNone/>
-            </a:pPr>
-            <a:r>
-              <a:rPr lang="en-US" sz="1000" b="1" dirty="0">
-                <a:solidFill>
-                  <a:srgbClr val="00144C"/>
+                <a:spcPts val="1792"/>
+              </a:lnSpc>
+              <a:spcAft>
+                <a:spcPts val="1400"/>
+              </a:spcAft>
+              <a:buNone/>
+            </a:pPr>
+            <a:r>
+              <a:rPr lang="en-US" sz="1600" dirty="0">
+                <a:solidFill>
+                  <a:srgbClr val="052243"/>
                 </a:solidFill>
                 <a:latin typeface="Arial" pitchFamily="34" charset="0"/>
                 <a:ea typeface="Arial" pitchFamily="34" charset="-122"/>
                 <a:cs typeface="Arial" pitchFamily="34" charset="-120"/>
               </a:rPr>
-              <a:t>IN ACTIVE DEVELOPMENT / CONTROLLED BY FEATURE-GATE</a:t>
-            </a:r>
-            <a:endParaRPr lang="en-US" sz="1000" dirty="0"/>
-          </a:p>
-        </p:txBody>
-      </p:sp>
-      <p:sp>
-        <p:nvSpPr>
-          <p:cNvPr id="5" name="Text 3"/>
-          <p:cNvSpPr/>
-          <p:nvPr/>
-        </p:nvSpPr>
-        <p:spPr>
-          <a:xfrm>
-            <a:off x="355550" y="1524000"/>
-            <a:ext cx="3704793" cy="775097"/>
-          </a:xfrm>
-          <a:prstGeom prst="rect">
-            <a:avLst/>
-          </a:prstGeom>
-          <a:noFill/>
-          <a:ln/>
-        </p:spPr>
-        <p:txBody>
-          <a:bodyPr wrap="square" lIns="0" tIns="0" rIns="0" bIns="0" rtlCol="0" anchor="t"/>
-          <a:lstStyle/>
+              <a:t>Experimental channel since v1.12.0</a:t>
+            </a:r>
+            <a:endParaRPr lang="en-US" sz="1600" dirty="0"/>
+          </a:p>
           <a:p>
             <a:pPr algn="l" indent="0" marL="0">
               <a:lnSpc>
-                <a:spcPts val="2035"/>
-              </a:lnSpc>
-              <a:spcAft>
-                <a:spcPts val="1100"/>
-              </a:spcAft>
-              <a:buNone/>
-            </a:pPr>
-            <a:r>
-              <a:rPr lang="en-US" sz="1850" b="1" dirty="0">
+                <a:spcPts val="1792"/>
+              </a:lnSpc>
+              <a:spcAft>
+                <a:spcPts val="1400"/>
+              </a:spcAft>
+              <a:buNone/>
+            </a:pPr>
+            <a:r>
+              <a:rPr lang="en-US" sz="1600" dirty="0">
                 <a:solidFill>
                   <a:srgbClr val="052243"/>
                 </a:solidFill>
@@ -6110,22 +6938,22 @@
                 <a:ea typeface="Arial" pitchFamily="34" charset="-122"/>
                 <a:cs typeface="Arial" pitchFamily="34" charset="-120"/>
               </a:rPr>
-              <a:t>Ordered phases expose resource application and readiness progress.</a:t>
-            </a:r>
-            <a:endParaRPr lang="en-US" sz="1850" dirty="0"/>
-          </a:p>
-        </p:txBody>
-      </p:sp>
-      <p:sp>
-        <p:nvSpPr>
-          <p:cNvPr id="6" name="Text 4"/>
+              <a:t>Controlled by feature gate</a:t>
+            </a:r>
+            <a:endParaRPr lang="en-US" sz="1600" dirty="0"/>
+          </a:p>
+        </p:txBody>
+      </p:sp>
+      <p:sp>
+        <p:nvSpPr>
+          <p:cNvPr id="4" name="Text 2"/>
           <p:cNvSpPr/>
           <p:nvPr/>
         </p:nvSpPr>
         <p:spPr>
           <a:xfrm>
-            <a:off x="355550" y="2438698"/>
-            <a:ext cx="3632150" cy="1120973"/>
+            <a:off x="355550" y="2156520"/>
+            <a:ext cx="3632150" cy="1579959"/>
           </a:xfrm>
           <a:prstGeom prst="rect">
             <a:avLst/>
@@ -6156,7 +6984,7 @@
                 <a:ea typeface="Arial" pitchFamily="34" charset="-122"/>
                 <a:cs typeface="Arial" pitchFamily="34" charset="-120"/>
               </a:rPr>
-              <a:t>Apply resource groups in phase order</a:t>
+              <a:t>Set spec.namespace: use an existing user-managed namespace.</a:t>
             </a:r>
             <a:endParaRPr lang="en-US" sz="1600" dirty="0"/>
           </a:p>
@@ -6180,7 +7008,7 @@
                 <a:ea typeface="Arial" pitchFamily="34" charset="-122"/>
                 <a:cs typeface="Arial" pitchFamily="34" charset="-120"/>
               </a:rPr>
-              <a:t>Wait for applicable readiness checks</a:t>
+              <a:t>Omit it: OLM manages a derived namespace.</a:t>
             </a:r>
             <a:endParaRPr lang="en-US" sz="1600" dirty="0"/>
           </a:p>
@@ -6204,7 +7032,7 @@
                 <a:ea typeface="Arial" pitchFamily="34" charset="-122"/>
                 <a:cs typeface="Arial" pitchFamily="34" charset="-120"/>
               </a:rPr>
-              <a:t>Inspect revision content and ownership changes</a:t>
+              <a:t>Deletion removes that namespace and its contents.</a:t>
             </a:r>
             <a:endParaRPr lang="en-US" sz="1600" dirty="0"/>
           </a:p>
@@ -6212,7 +7040,7 @@
       </p:sp>
       <p:pic>
         <p:nvPicPr>
-          <p:cNvPr id="7" name="Image 0" descr="/Users/jordan/Documents/devel/breadcrumbs/2026-kubecon-wip/dry-run/theme/assets/s06.png">    </p:cNvPr>
+          <p:cNvPr id="5" name="Image 0" descr="/Users/jordan/Documents/devel/breadcrumbs/2026-kubecon-wip/current-visuals/namespace-management.png">    </p:cNvPr>
           <p:cNvPicPr>
             <a:picLocks noChangeAspect="1"/>
           </p:cNvPicPr>
@@ -6236,14 +7064,14 @@
       </p:pic>
       <p:sp>
         <p:nvSpPr>
-          <p:cNvPr id="8" name="Text 5"/>
+          <p:cNvPr id="6" name="Text 3"/>
           <p:cNvSpPr/>
           <p:nvPr/>
         </p:nvSpPr>
         <p:spPr>
           <a:xfrm>
-            <a:off x="1968401" y="4711601"/>
-            <a:ext cx="6217920" cy="304800"/>
+            <a:off x="8244233" y="4940201"/>
+            <a:ext cx="544068" cy="107900"/>
           </a:xfrm>
           <a:prstGeom prst="rect">
             <a:avLst/>
@@ -6255,14 +7083,14 @@
           <a:bodyPr wrap="square" lIns="0" tIns="0" rIns="0" bIns="0" rtlCol="0" anchor="t"/>
           <a:lstStyle/>
           <a:p>
-            <a:pPr algn="l" indent="0" marL="0">
-              <a:lnSpc>
-                <a:spcPts val="1176"/>
-              </a:lnSpc>
-              <a:buNone/>
-            </a:pPr>
-            <a:r>
-              <a:rPr lang="en-US" sz="1050" i="1" dirty="0">
+            <a:pPr algn="r" indent="0" marL="0">
+              <a:lnSpc>
+                <a:spcPts val="850"/>
+              </a:lnSpc>
+              <a:buNone/>
+            </a:pPr>
+            <a:r>
+              <a:rPr lang="en-US" sz="850" dirty="0">
                 <a:solidFill>
                   <a:srgbClr val="052243"/>
                 </a:solidFill>
@@ -6270,49 +7098,7 @@
                 <a:ea typeface="Arial" pitchFamily="34" charset="-122"/>
                 <a:cs typeface="Arial" pitchFamily="34" charset="-120"/>
               </a:rPr>
-              <a:t>Readiness checks show which phase is waiting.</a:t>
-            </a:r>
-            <a:endParaRPr lang="en-US" sz="1050" dirty="0"/>
-          </a:p>
-        </p:txBody>
-      </p:sp>
-      <p:sp>
-        <p:nvSpPr>
-          <p:cNvPr id="9" name="Text 6"/>
-          <p:cNvSpPr/>
-          <p:nvPr/>
-        </p:nvSpPr>
-        <p:spPr>
-          <a:xfrm>
-            <a:off x="8244233" y="4940201"/>
-            <a:ext cx="544068" cy="107900"/>
-          </a:xfrm>
-          <a:prstGeom prst="rect">
-            <a:avLst/>
-          </a:prstGeom>
-          <a:noFill/>
-          <a:ln/>
-        </p:spPr>
-        <p:txBody>
-          <a:bodyPr wrap="square" lIns="0" tIns="0" rIns="0" bIns="0" rtlCol="0" anchor="t"/>
-          <a:lstStyle/>
-          <a:p>
-            <a:pPr algn="r" indent="0" marL="0">
-              <a:lnSpc>
-                <a:spcPts val="850"/>
-              </a:lnSpc>
-              <a:buNone/>
-            </a:pPr>
-            <a:r>
-              <a:rPr lang="en-US" sz="850" dirty="0">
-                <a:solidFill>
-                  <a:srgbClr val="052243"/>
-                </a:solidFill>
-                <a:latin typeface="Arial" pitchFamily="34" charset="0"/>
-                <a:ea typeface="Arial" pitchFamily="34" charset="-122"/>
-                <a:cs typeface="Arial" pitchFamily="34" charset="-120"/>
-              </a:rPr>
-              <a:t>6 / 25</a:t>
+              <a:t>6 / 27</a:t>
             </a:r>
             <a:endParaRPr lang="en-US" sz="850" dirty="0"/>
           </a:p>
@@ -6386,7 +7172,7 @@
                 <a:ea typeface="Arial" pitchFamily="34" charset="-122"/>
                 <a:cs typeface="Arial" pitchFamily="34" charset="-120"/>
               </a:rPr>
-              <a:t>User control of extension deployments</a:t>
+              <a:t>Inspect phased resource rollouts</a:t>
             </a:r>
             <a:endParaRPr lang="en-US" sz="2800" dirty="0"/>
           </a:p>
@@ -6473,7 +7259,7 @@
         <p:spPr>
           <a:xfrm>
             <a:off x="355550" y="1524000"/>
-            <a:ext cx="3704793" cy="516731"/>
+            <a:ext cx="3704793" cy="775097"/>
           </a:xfrm>
           <a:prstGeom prst="rect">
             <a:avLst/>
@@ -6503,7 +7289,7 @@
                 <a:ea typeface="Arial" pitchFamily="34" charset="-122"/>
                 <a:cs typeface="Arial" pitchFamily="34" charset="-120"/>
               </a:rPr>
-              <a:t>Flexible user-defined deployment configuration.</a:t>
+              <a:t>Ordered phases expose resource application and readiness progress.</a:t>
             </a:r>
             <a:endParaRPr lang="en-US" sz="1850" dirty="0"/>
           </a:p>
@@ -6517,8 +7303,8 @@
         </p:nvSpPr>
         <p:spPr>
           <a:xfrm>
-            <a:off x="355550" y="2180332"/>
-            <a:ext cx="3632150" cy="1579959"/>
+            <a:off x="355550" y="2438698"/>
+            <a:ext cx="3632150" cy="1120973"/>
           </a:xfrm>
           <a:prstGeom prst="rect">
             <a:avLst/>
@@ -6549,7 +7335,7 @@
                 <a:ea typeface="Arial" pitchFamily="34" charset="-122"/>
                 <a:cs typeface="Arial" pitchFamily="34" charset="-120"/>
               </a:rPr>
-              <a:t>Environment variables and resource settings</a:t>
+              <a:t>Apply resource groups in phase order</a:t>
             </a:r>
             <a:endParaRPr lang="en-US" sz="1600" dirty="0"/>
           </a:p>
@@ -6573,7 +7359,7 @@
                 <a:ea typeface="Arial" pitchFamily="34" charset="-122"/>
                 <a:cs typeface="Arial" pitchFamily="34" charset="-120"/>
               </a:rPr>
-              <a:t>Placement, volumes and deployment metadata</a:t>
+              <a:t>Wait for applicable readiness checks</a:t>
             </a:r>
             <a:endParaRPr lang="en-US" sz="1600" dirty="0"/>
           </a:p>
@@ -6597,7 +7383,7 @@
                 <a:ea typeface="Arial" pitchFamily="34" charset="-122"/>
                 <a:cs typeface="Arial" pitchFamily="34" charset="-120"/>
               </a:rPr>
-              <a:t>Operator-provided configuration and schemas</a:t>
+              <a:t>Inspect ClusterObjectDeployment and revision status</a:t>
             </a:r>
             <a:endParaRPr lang="en-US" sz="1600" dirty="0"/>
           </a:p>
@@ -6605,7 +7391,7 @@
       </p:sp>
       <p:pic>
         <p:nvPicPr>
-          <p:cNvPr id="7" name="Image 0" descr="/Users/jordan/Documents/devel/breadcrumbs/2026-kubecon-wip/dry-run/theme/assets/s07.png">    </p:cNvPr>
+          <p:cNvPr id="7" name="Image 0" descr="/Users/jordan/Documents/devel/breadcrumbs/2026-kubecon-wip/dry-run/theme/assets/s06.png">    </p:cNvPr>
           <p:cNvPicPr>
             <a:picLocks noChangeAspect="1"/>
           </p:cNvPicPr>
@@ -6663,7 +7449,7 @@
                 <a:ea typeface="Arial" pitchFamily="34" charset="-122"/>
                 <a:cs typeface="Arial" pitchFamily="34" charset="-120"/>
               </a:rPr>
-              <a:t>OLM applies user choices through operator configuration.</a:t>
+              <a:t>Readiness checks show which phase is waiting.</a:t>
             </a:r>
             <a:endParaRPr lang="en-US" sz="1050" dirty="0"/>
           </a:p>
@@ -6705,7 +7491,7 @@
                 <a:ea typeface="Arial" pitchFamily="34" charset="-122"/>
                 <a:cs typeface="Arial" pitchFamily="34" charset="-120"/>
               </a:rPr>
-              <a:t>7 / 25</a:t>
+              <a:t>7 / 27</a:t>
             </a:r>
             <a:endParaRPr lang="en-US" sz="850" dirty="0"/>
           </a:p>
@@ -6779,7 +7565,7 @@
                 <a:ea typeface="Arial" pitchFamily="34" charset="-122"/>
                 <a:cs typeface="Arial" pitchFamily="34" charset="-120"/>
               </a:rPr>
-              <a:t>OLMv0 → OLMv1 migration</a:t>
+              <a:t>User control of extension deployments</a:t>
             </a:r>
             <a:endParaRPr lang="en-US" sz="2800" dirty="0"/>
           </a:p>
@@ -6794,7 +7580,7 @@
         <p:spPr>
           <a:xfrm>
             <a:off x="355550" y="1104900"/>
-            <a:ext cx="1853505" cy="253752"/>
+            <a:ext cx="4061371" cy="253752"/>
           </a:xfrm>
           <a:prstGeom prst="rect">
             <a:avLst/>
@@ -6824,7 +7610,7 @@
         <p:spPr>
           <a:xfrm>
             <a:off x="469850" y="1168301"/>
-            <a:ext cx="1657404" cy="126950"/>
+            <a:ext cx="3909426" cy="126950"/>
           </a:xfrm>
           <a:prstGeom prst="rect">
             <a:avLst/>
@@ -6851,7 +7637,7 @@
                 <a:ea typeface="Arial" pitchFamily="34" charset="-122"/>
                 <a:cs typeface="Arial" pitchFamily="34" charset="-120"/>
               </a:rPr>
-              <a:t>IN ACTIVE DEVELOPMENT</a:t>
+              <a:t>IN ACTIVE DEVELOPMENT / CONTROLLED BY FEATURE-GATE</a:t>
             </a:r>
             <a:endParaRPr lang="en-US" sz="1000" dirty="0"/>
           </a:p>
@@ -6896,7 +7682,7 @@
                 <a:ea typeface="Arial" pitchFamily="34" charset="-122"/>
                 <a:cs typeface="Arial" pitchFamily="34" charset="-120"/>
               </a:rPr>
-              <a:t>Move operator management from OLMv0 to OLMv1.</a:t>
+              <a:t>Flexible user-defined deployment configuration.</a:t>
             </a:r>
             <a:endParaRPr lang="en-US" sz="1850" dirty="0"/>
           </a:p>
@@ -6942,7 +7728,7 @@
                 <a:ea typeface="Arial" pitchFamily="34" charset="-122"/>
                 <a:cs typeface="Arial" pitchFamily="34" charset="-120"/>
               </a:rPr>
-              <a:t>Prepare v1 catalogs from v0 CatalogSources</a:t>
+              <a:t>Environment variables and resource settings</a:t>
             </a:r>
             <a:endParaRPr lang="en-US" sz="1600" dirty="0"/>
           </a:p>
@@ -6966,7 +7752,7 @@
                 <a:ea typeface="Arial" pitchFamily="34" charset="-122"/>
                 <a:cs typeface="Arial" pitchFamily="34" charset="-120"/>
               </a:rPr>
-              <a:t>Check and preview operator migrations</a:t>
+              <a:t>Placement, volumes and deployment metadata</a:t>
             </a:r>
             <a:endParaRPr lang="en-US" sz="1600" dirty="0"/>
           </a:p>
@@ -6990,7 +7776,7 @@
                 <a:ea typeface="Arial" pitchFamily="34" charset="-122"/>
                 <a:cs typeface="Arial" pitchFamily="34" charset="-120"/>
               </a:rPr>
-              <a:t>Migration library with example binaries</a:t>
+              <a:t>Operator-provided configuration and schemas</a:t>
             </a:r>
             <a:endParaRPr lang="en-US" sz="1600" dirty="0"/>
           </a:p>
@@ -6998,7 +7784,7 @@
       </p:sp>
       <p:pic>
         <p:nvPicPr>
-          <p:cNvPr id="7" name="Image 0" descr="/Users/jordan/Documents/devel/breadcrumbs/2026-kubecon-wip/dry-run/theme/assets/s08.png">    </p:cNvPr>
+          <p:cNvPr id="7" name="Image 0" descr="/Users/jordan/Documents/devel/breadcrumbs/2026-kubecon-wip/dry-run/theme/assets/s07.png">    </p:cNvPr>
           <p:cNvPicPr>
             <a:picLocks noChangeAspect="1"/>
           </p:cNvPicPr>
@@ -7056,7 +7842,7 @@
                 <a:ea typeface="Arial" pitchFamily="34" charset="-122"/>
                 <a:cs typeface="Arial" pitchFamily="34" charset="-120"/>
               </a:rPr>
-              <a:t>Structured output supports automation and models.</a:t>
+              <a:t>OLM applies user choices through operator configuration.</a:t>
             </a:r>
             <a:endParaRPr lang="en-US" sz="1050" dirty="0"/>
           </a:p>
@@ -7098,7 +7884,7 @@
                 <a:ea typeface="Arial" pitchFamily="34" charset="-122"/>
                 <a:cs typeface="Arial" pitchFamily="34" charset="-120"/>
               </a:rPr>
-              <a:t>8 / 25</a:t>
+              <a:t>8 / 27</a:t>
             </a:r>
             <a:endParaRPr lang="en-US" sz="850" dirty="0"/>
           </a:p>
@@ -7172,7 +7958,7 @@
                 <a:ea typeface="Arial" pitchFamily="34" charset="-122"/>
                 <a:cs typeface="Arial" pitchFamily="34" charset="-120"/>
               </a:rPr>
-              <a:t>Shared lifecycle logic in library-olm</a:t>
+              <a:t>OLMv0 → OLMv1 migration</a:t>
             </a:r>
             <a:endParaRPr lang="en-US" sz="2800" dirty="0"/>
           </a:p>
@@ -7289,7 +8075,7 @@
                 <a:ea typeface="Arial" pitchFamily="34" charset="-122"/>
                 <a:cs typeface="Arial" pitchFamily="34" charset="-120"/>
               </a:rPr>
-              <a:t>Reuse lifecycle logic through a library with explicit contracts.</a:t>
+              <a:t>Move operator management from OLMv0 to OLMv1.</a:t>
             </a:r>
             <a:endParaRPr lang="en-US" sz="1850" dirty="0"/>
           </a:p>
@@ -7335,7 +8121,7 @@
                 <a:ea typeface="Arial" pitchFamily="34" charset="-122"/>
                 <a:cs typeface="Arial" pitchFamily="34" charset="-120"/>
               </a:rPr>
-              <a:t>Share migration checks and workflow logic</a:t>
+              <a:t>Prepare v1 catalogs from v0 CatalogSources</a:t>
             </a:r>
             <a:endParaRPr lang="en-US" sz="1600" dirty="0"/>
           </a:p>
@@ -7359,7 +8145,7 @@
                 <a:ea typeface="Arial" pitchFamily="34" charset="-122"/>
                 <a:cs typeface="Arial" pitchFamily="34" charset="-120"/>
               </a:rPr>
-              <a:t>Exercise current development examples</a:t>
+              <a:t>Check and preview operator migrations</a:t>
             </a:r>
             <a:endParaRPr lang="en-US" sz="1600" dirty="0"/>
           </a:p>
@@ -7383,7 +8169,7 @@
                 <a:ea typeface="Arial" pitchFamily="34" charset="-122"/>
                 <a:cs typeface="Arial" pitchFamily="34" charset="-120"/>
               </a:rPr>
-              <a:t>Record expected results in reusable fixtures</a:t>
+              <a:t>Migration library with example binaries</a:t>
             </a:r>
             <a:endParaRPr lang="en-US" sz="1600" dirty="0"/>
           </a:p>
@@ -7391,7 +8177,7 @@
       </p:sp>
       <p:pic>
         <p:nvPicPr>
-          <p:cNvPr id="7" name="Image 0" descr="/Users/jordan/Documents/devel/breadcrumbs/2026-kubecon-wip/dry-run/theme/assets/s09.png">    </p:cNvPr>
+          <p:cNvPr id="7" name="Image 0" descr="/Users/jordan/Documents/devel/breadcrumbs/2026-kubecon-wip/dry-run/theme/assets/s08.png">    </p:cNvPr>
           <p:cNvPicPr>
             <a:picLocks noChangeAspect="1"/>
           </p:cNvPicPr>
@@ -7449,7 +8235,7 @@
                 <a:ea typeface="Arial" pitchFamily="34" charset="-122"/>
                 <a:cs typeface="Arial" pitchFamily="34" charset="-120"/>
               </a:rPr>
-              <a:t>Examples and fixtures make supported behavior concrete.</a:t>
+              <a:t>Structured output supports automation and models.</a:t>
             </a:r>
             <a:endParaRPr lang="en-US" sz="1050" dirty="0"/>
           </a:p>
@@ -7491,7 +8277,7 @@
                 <a:ea typeface="Arial" pitchFamily="34" charset="-122"/>
                 <a:cs typeface="Arial" pitchFamily="34" charset="-120"/>
               </a:rPr>
-              <a:t>9 / 25</a:t>
+              <a:t>9 / 27</a:t>
             </a:r>
             <a:endParaRPr lang="en-US" sz="850" dirty="0"/>
           </a:p>
@@ -8416,7 +9202,7 @@
           </a:p>
           <a:p>
             <a:r>
-              <a:t>[SDK import: speaker=Attila; section=SDK; sourceSlide10; duration=60 seconds; start=24:00; end=25:00]</a:t>
+              <a:t>[SDK import: speaker=Attila; section=SDK; sourceSlide10; duration=60 seconds; start=26:00; end=27:00]</a:t>
             </a:r>
           </a:p>
         </p:txBody>
@@ -8520,7 +9306,7 @@
           </a:p>
           <a:p>
             <a:r>
-              <a:t>[SDK import: speaker=Attila; section=SDK; sourceSlide11; duration=60 seconds; start=25:00; end=26:00]</a:t>
+              <a:t>[SDK import: speaker=Attila; section=SDK; sourceSlide11; duration=60 seconds; start=27:00; end=28:00]</a:t>
             </a:r>
           </a:p>
         </p:txBody>
@@ -8624,7 +9410,7 @@
           </a:p>
           <a:p>
             <a:r>
-              <a:t>[SDK import: speaker=Attila; section=SDK; sourceSlide12; duration=60 seconds; start=26:00; end=27:00]</a:t>
+              <a:t>[SDK import: speaker=Attila; section=SDK; sourceSlide12; duration=60 seconds; start=28:00; end=29:00]</a:t>
             </a:r>
           </a:p>
         </p:txBody>
@@ -8926,7 +9712,7 @@
           </a:p>
           <a:p>
             <a:r>
-              <a:t>[SDK import: speaker=Attila; section=SDK; sourceSlide3; duration=60 seconds; start=17:00; end=18:00]</a:t>
+              <a:t>[SDK import: speaker=Attila; section=SDK; sourceSlide3; duration=60 seconds; start=19:00; end=20:00]</a:t>
             </a:r>
           </a:p>
         </p:txBody>
@@ -9030,7 +9816,7 @@
           </a:p>
           <a:p>
             <a:r>
-              <a:t>[SDK import: speaker=Attila; section=SDK; sourceSlide4; duration=60 seconds; start=18:00; end=19:00]</a:t>
+              <a:t>[SDK import: speaker=Attila; section=SDK; sourceSlide4; duration=60 seconds; start=20:00; end=21:00]</a:t>
             </a:r>
           </a:p>
         </p:txBody>
@@ -9134,7 +9920,7 @@
           </a:p>
           <a:p>
             <a:r>
-              <a:t>[SDK import: speaker=Attila; section=SDK; sourceSlide5; duration=60 seconds; start=19:00; end=20:00]</a:t>
+              <a:t>[SDK import: speaker=Attila; section=SDK; sourceSlide5; duration=60 seconds; start=21:00; end=22:00]</a:t>
             </a:r>
           </a:p>
         </p:txBody>
@@ -9238,7 +10024,7 @@
           </a:p>
           <a:p>
             <a:r>
-              <a:t>[SDK import: speaker=Attila; section=SDK; sourceSlide6; duration=60 seconds; start=20:00; end=21:00]</a:t>
+              <a:t>[SDK import: speaker=Attila; section=SDK; sourceSlide6; duration=60 seconds; start=22:00; end=23:00]</a:t>
             </a:r>
           </a:p>
         </p:txBody>
@@ -9342,7 +10128,7 @@
           </a:p>
           <a:p>
             <a:r>
-              <a:t>[SDK import: speaker=Attila; section=SDK; sourceSlide7; duration=60 seconds; start=21:00; end=22:00]</a:t>
+              <a:t>[SDK import: speaker=Attila; section=SDK; sourceSlide7; duration=60 seconds; start=23:00; end=24:00]</a:t>
             </a:r>
           </a:p>
         </p:txBody>
@@ -9446,7 +10232,7 @@
           </a:p>
           <a:p>
             <a:r>
-              <a:t>[SDK import: speaker=Attila; section=SDK; sourceSlide8; duration=60 seconds; start=22:00; end=23:00]</a:t>
+              <a:t>[SDK import: speaker=Attila; section=SDK; sourceSlide8; duration=60 seconds; start=24:00; end=25:00]</a:t>
             </a:r>
           </a:p>
         </p:txBody>
@@ -9550,7 +10336,7 @@
           </a:p>
           <a:p>
             <a:r>
-              <a:t>[SDK import: speaker=Attila; section=SDK; sourceSlide9; duration=60 seconds; start=23:00; end=24:00]</a:t>
+              <a:t>[SDK import: speaker=Attila; section=SDK; sourceSlide9; duration=60 seconds; start=25:00; end=26:00]</a:t>
             </a:r>
           </a:p>
         </p:txBody>
